--- a/modulo-05/05.09 - Configurações Avançadas de Páginas de Objeto/05.09_Object_Page_avançada.pptx
+++ b/modulo-05/05.09 - Configurações Avançadas de Páginas de Objeto/05.09_Object_Page_avançada.pptx
@@ -1728,7 +1728,7 @@
                   <a:srgbClr val="8FA3C7"/>
                 </a:solidFill>
               </a:rPr>
-              <a:t>ABAP Moderno · Módulo 03 — SAP Fiori Elements com OData V4  ·  Aula 9 de 11 — Object Page avançada</a:t>
+              <a:t>ABAP Moderno · Módulo 05 — SAP Fiori Elements com OData V4  ·  Aula 9 de 11 — Object Page avançada</a:t>
             </a:r>
             <a:endParaRPr lang="en-US" sz="900" dirty="0"/>
           </a:p>
@@ -1874,7 +1874,7 @@
                   <a:srgbClr val="556B82"/>
                 </a:solidFill>
               </a:rPr>
-              <a:t>ABAP Moderno · Módulo 03 — SAP Fiori Elements com OData V4  ·  Aula 9 de 11 — Object Page avançada</a:t>
+              <a:t>ABAP Moderno · Módulo 05 — SAP Fiori Elements com OData V4  ·  Aula 9 de 11 — Object Page avançada</a:t>
             </a:r>
             <a:endParaRPr lang="en-US" sz="900" dirty="0"/>
           </a:p>
@@ -2305,7 +2305,7 @@
                   <a:srgbClr val="89D1FF"/>
                 </a:solidFill>
               </a:rPr>
-              <a:t>MÓDULO 03 · AULA 09 DE 11</a:t>
+              <a:t>MÓDULO 05 · AULA 09 DE 11</a:t>
             </a:r>
             <a:endParaRPr lang="en-US" sz="1400" dirty="0"/>
           </a:p>
@@ -2377,7 +2377,7 @@
                   <a:srgbClr val="D1EFFF"/>
                 </a:solidFill>
               </a:rPr>
-              <a:t>Header com data points, tabela filha de bookings, a subobject page configurada e comportamento dinâmico com feature control.</a:t>
+              <a:t>Header com data points, tabela filha de itens, a subobject page configurada e comportamento dinâmico com feature control.</a:t>
             </a:r>
             <a:endParaRPr lang="en-US" sz="1700" dirty="0"/>
           </a:p>
@@ -2735,7 +2735,7 @@
                   <a:srgbClr val="8FA3C7"/>
                 </a:solidFill>
               </a:rPr>
-              <a:t>ABAP Moderno · Módulo 03 — SAP Fiori Elements com OData V4 · Design System SAP Horizon</a:t>
+              <a:t>ABAP Moderno · Módulo 05 — SAP Fiori Elements com OData V4 · Design System SAP Horizon</a:t>
             </a:r>
             <a:endParaRPr lang="en-US" sz="1100" dirty="0"/>
           </a:p>
@@ -2842,7 +2842,7 @@
                   <a:srgbClr val="89D1FF"/>
                 </a:solidFill>
               </a:rPr>
-              <a:t>AULA 03.09 · SEÇÃO 3</a:t>
+              <a:t>AULA 05.09 · SEÇÃO 3</a:t>
             </a:r>
             <a:endParaRPr lang="en-US" sz="1300" dirty="0"/>
           </a:p>
@@ -3301,7 +3301,7 @@
                   <a:srgbClr val="1D2D3E"/>
                 </a:solidFill>
               </a:rPr>
-              <a:t>Accept Travel só para viagens não aceitas</a:t>
+              <a:t>Aprovar só pedidos aguardando aprovação</a:t>
             </a:r>
             <a:endParaRPr lang="en-US" sz="2800" dirty="0"/>
           </a:p>
@@ -3365,7 +3365,7 @@
         <p:spPr>
           <a:xfrm>
             <a:off x="640080" y="1700784"/>
-            <a:ext cx="3707892" cy="292608"/>
+            <a:ext cx="3163824" cy="292608"/>
           </a:xfrm>
           <a:prstGeom prst="rect">
             <a:avLst/>
@@ -3385,7 +3385,7 @@
         <p:spPr>
           <a:xfrm>
             <a:off x="640080" y="1700784"/>
-            <a:ext cx="3707892" cy="27432"/>
+            <a:ext cx="3163824" cy="27432"/>
           </a:xfrm>
           <a:prstGeom prst="rect">
             <a:avLst/>
@@ -3405,7 +3405,7 @@
         <p:spPr>
           <a:xfrm>
             <a:off x="731520" y="1719072"/>
-            <a:ext cx="3525012" cy="274320"/>
+            <a:ext cx="2980944" cy="274320"/>
           </a:xfrm>
           <a:prstGeom prst="rect">
             <a:avLst/>
@@ -3426,7 +3426,7 @@
                   <a:srgbClr val="FFFFFF"/>
                 </a:solidFill>
               </a:rPr>
-              <a:t>zbp_i_fe_travel_######.clas.locals_imp.abap</a:t>
+              <a:t>zbp_r_pc_pedido.clas.locals_imp.abap</a:t>
             </a:r>
             <a:endParaRPr lang="en-US" sz="950" dirty="0"/>
           </a:p>
@@ -3462,7 +3462,7 @@
                   <a:srgbClr val="9DA5B4"/>
                 </a:solidFill>
               </a:rPr>
-              <a:t>Behavior pool › lhc_travel</a:t>
+              <a:t>ZBP_R_PC_PEDIDO › lhc_pedido (simplificado)</a:t>
             </a:r>
             <a:endParaRPr lang="en-US" sz="850" dirty="0"/>
           </a:p>
@@ -3788,6 +3788,26 @@
             </a:r>
             <a:endParaRPr lang="en-US" sz="900" dirty="0"/>
           </a:p>
+          <a:p>
+            <a:pPr algn="r" indent="0" marL="0">
+              <a:lnSpc>
+                <a:spcPct val="105000"/>
+              </a:lnSpc>
+              <a:buNone/>
+            </a:pPr>
+            <a:r>
+              <a:rPr lang="en-US" sz="900" dirty="0">
+                <a:solidFill>
+                  <a:srgbClr val="6E7681"/>
+                </a:solidFill>
+                <a:latin typeface="Courier New" pitchFamily="34" charset="0"/>
+                <a:ea typeface="Courier New" pitchFamily="34" charset="-122"/>
+                <a:cs typeface="Courier New" pitchFamily="34" charset="-120"/>
+              </a:rPr>
+              <a:t>16</a:t>
+            </a:r>
+            <a:endParaRPr lang="en-US" sz="900" dirty="0"/>
+          </a:p>
         </p:txBody>
       </p:sp>
       <p:sp>
@@ -3826,7 +3846,7 @@
                 <a:ea typeface="Courier New" pitchFamily="34" charset="-122"/>
                 <a:cs typeface="Courier New" pitchFamily="34" charset="-120"/>
               </a:rPr>
-              <a:t>" BDEF: action ( features : instance ) acceptTravel result [1] $self;</a:t>
+              <a:t>" BDEF: action ( features : instance ) AprovarPedido result [1] $self;</a:t>
             </a:r>
             <a:endParaRPr lang="en-US" sz="900" dirty="0"/>
           </a:p>
@@ -3996,73 +4016,7 @@
                 <a:ea typeface="Courier New" pitchFamily="34" charset="-122"/>
                 <a:cs typeface="Courier New" pitchFamily="34" charset="-120"/>
               </a:rPr>
-              <a:t>ZI_FE_TRAVEL_</a:t>
-            </a:r>
-            <a:r>
-              <a:rPr lang="en-US" sz="900" dirty="0">
-                <a:solidFill>
-                  <a:srgbClr val="CCCCCC"/>
-                </a:solidFill>
-                <a:latin typeface="Courier New" pitchFamily="34" charset="0"/>
-                <a:ea typeface="Courier New" pitchFamily="34" charset="-122"/>
-                <a:cs typeface="Courier New" pitchFamily="34" charset="-120"/>
-              </a:rPr>
-              <a:t>#</a:t>
-            </a:r>
-            <a:r>
-              <a:rPr lang="en-US" sz="900" dirty="0">
-                <a:solidFill>
-                  <a:srgbClr val="CCCCCC"/>
-                </a:solidFill>
-                <a:latin typeface="Courier New" pitchFamily="34" charset="0"/>
-                <a:ea typeface="Courier New" pitchFamily="34" charset="-122"/>
-                <a:cs typeface="Courier New" pitchFamily="34" charset="-120"/>
-              </a:rPr>
-              <a:t>#</a:t>
-            </a:r>
-            <a:r>
-              <a:rPr lang="en-US" sz="900" dirty="0">
-                <a:solidFill>
-                  <a:srgbClr val="CCCCCC"/>
-                </a:solidFill>
-                <a:latin typeface="Courier New" pitchFamily="34" charset="0"/>
-                <a:ea typeface="Courier New" pitchFamily="34" charset="-122"/>
-                <a:cs typeface="Courier New" pitchFamily="34" charset="-120"/>
-              </a:rPr>
-              <a:t>#</a:t>
-            </a:r>
-            <a:r>
-              <a:rPr lang="en-US" sz="900" dirty="0">
-                <a:solidFill>
-                  <a:srgbClr val="CCCCCC"/>
-                </a:solidFill>
-                <a:latin typeface="Courier New" pitchFamily="34" charset="0"/>
-                <a:ea typeface="Courier New" pitchFamily="34" charset="-122"/>
-                <a:cs typeface="Courier New" pitchFamily="34" charset="-120"/>
-              </a:rPr>
-              <a:t>#</a:t>
-            </a:r>
-            <a:r>
-              <a:rPr lang="en-US" sz="900" dirty="0">
-                <a:solidFill>
-                  <a:srgbClr val="CCCCCC"/>
-                </a:solidFill>
-                <a:latin typeface="Courier New" pitchFamily="34" charset="0"/>
-                <a:ea typeface="Courier New" pitchFamily="34" charset="-122"/>
-                <a:cs typeface="Courier New" pitchFamily="34" charset="-120"/>
-              </a:rPr>
-              <a:t>#</a:t>
-            </a:r>
-            <a:r>
-              <a:rPr lang="en-US" sz="900" dirty="0">
-                <a:solidFill>
-                  <a:srgbClr val="CCCCCC"/>
-                </a:solidFill>
-                <a:latin typeface="Courier New" pitchFamily="34" charset="0"/>
-                <a:ea typeface="Courier New" pitchFamily="34" charset="-122"/>
-                <a:cs typeface="Courier New" pitchFamily="34" charset="-120"/>
-              </a:rPr>
-              <a:t>#</a:t>
+              <a:t>zr_pc_pedido</a:t>
             </a:r>
             <a:r>
               <a:rPr lang="en-US" sz="900" dirty="0">
@@ -4181,7 +4135,7 @@
                 <a:ea typeface="Courier New" pitchFamily="34" charset="-122"/>
                 <a:cs typeface="Courier New" pitchFamily="34" charset="-120"/>
               </a:rPr>
-              <a:t>Travel</a:t>
+              <a:t>Pedido</a:t>
             </a:r>
             <a:endParaRPr lang="en-US" sz="900" dirty="0"/>
           </a:p>
@@ -4256,7 +4210,7 @@
                 <a:ea typeface="Courier New" pitchFamily="34" charset="-122"/>
                 <a:cs typeface="Courier New" pitchFamily="34" charset="-120"/>
               </a:rPr>
-              <a:t>OverallStatus</a:t>
+              <a:t>StatusPedido</a:t>
             </a:r>
             <a:r>
               <a:rPr lang="en-US" sz="900" dirty="0">
@@ -4474,7 +4428,7 @@
                 <a:ea typeface="Courier New" pitchFamily="34" charset="-122"/>
                 <a:cs typeface="Courier New" pitchFamily="34" charset="-120"/>
               </a:rPr>
-              <a:t>travels</a:t>
+              <a:t>lt_pedidos</a:t>
             </a:r>
             <a:r>
               <a:rPr lang="en-US" sz="900" dirty="0">
@@ -4668,7 +4622,7 @@
                 <a:ea typeface="Courier New" pitchFamily="34" charset="-122"/>
                 <a:cs typeface="Courier New" pitchFamily="34" charset="-120"/>
               </a:rPr>
-              <a:t>travel</a:t>
+              <a:t>p</a:t>
             </a:r>
             <a:r>
               <a:rPr lang="en-US" sz="900" dirty="0">
@@ -4712,7 +4666,7 @@
                 <a:ea typeface="Courier New" pitchFamily="34" charset="-122"/>
                 <a:cs typeface="Courier New" pitchFamily="34" charset="-120"/>
               </a:rPr>
-              <a:t>travels</a:t>
+              <a:t>lt_pedidos</a:t>
             </a:r>
             <a:endParaRPr lang="en-US" sz="900" dirty="0"/>
           </a:p>
@@ -4787,7 +4741,7 @@
                 <a:ea typeface="Courier New" pitchFamily="34" charset="-122"/>
                 <a:cs typeface="Courier New" pitchFamily="34" charset="-120"/>
               </a:rPr>
-              <a:t>                 </a:t>
+              <a:t>                  </a:t>
             </a:r>
             <a:r>
               <a:rPr lang="en-US" sz="900" dirty="0">
@@ -4820,7 +4774,7 @@
                 <a:ea typeface="Courier New" pitchFamily="34" charset="-122"/>
                 <a:cs typeface="Courier New" pitchFamily="34" charset="-120"/>
               </a:rPr>
-              <a:t>travel-</a:t>
+              <a:t>p-</a:t>
             </a:r>
             <a:r>
               <a:rPr lang="en-US" sz="900" dirty="0">
@@ -4884,7 +4838,7 @@
                 <a:ea typeface="Courier New" pitchFamily="34" charset="-122"/>
                 <a:cs typeface="Courier New" pitchFamily="34" charset="-120"/>
               </a:rPr>
-              <a:t>action-acceptTravel</a:t>
+              <a:t>action-AprovarPedido</a:t>
             </a:r>
             <a:r>
               <a:rPr lang="en-US" sz="900" dirty="0">
@@ -5014,7 +4968,7 @@
                 <a:ea typeface="Courier New" pitchFamily="34" charset="-122"/>
                 <a:cs typeface="Courier New" pitchFamily="34" charset="-120"/>
               </a:rPr>
-              <a:t>travel-OverallStatus</a:t>
+              <a:t>p-</a:t>
             </a:r>
             <a:r>
               <a:rPr lang="en-US" sz="900" dirty="0">
@@ -5025,6 +4979,28 @@
                 <a:ea typeface="Courier New" pitchFamily="34" charset="-122"/>
                 <a:cs typeface="Courier New" pitchFamily="34" charset="-120"/>
               </a:rPr>
+              <a:t>%</a:t>
+            </a:r>
+            <a:r>
+              <a:rPr lang="en-US" sz="900" dirty="0">
+                <a:solidFill>
+                  <a:srgbClr val="CCCCCC"/>
+                </a:solidFill>
+                <a:latin typeface="Courier New" pitchFamily="34" charset="0"/>
+                <a:ea typeface="Courier New" pitchFamily="34" charset="-122"/>
+                <a:cs typeface="Courier New" pitchFamily="34" charset="-120"/>
+              </a:rPr>
+              <a:t>is_draft</a:t>
+            </a:r>
+            <a:r>
+              <a:rPr lang="en-US" sz="900" dirty="0">
+                <a:solidFill>
+                  <a:srgbClr val="CCCCCC"/>
+                </a:solidFill>
+                <a:latin typeface="Courier New" pitchFamily="34" charset="0"/>
+                <a:ea typeface="Courier New" pitchFamily="34" charset="-122"/>
+                <a:cs typeface="Courier New" pitchFamily="34" charset="-120"/>
+              </a:rPr>
               <a:t> </a:t>
             </a:r>
             <a:r>
@@ -5052,13 +5028,24 @@
             <a:r>
               <a:rPr lang="en-US" sz="900" dirty="0">
                 <a:solidFill>
-                  <a:srgbClr val="CE9178"/>
-                </a:solidFill>
-                <a:latin typeface="Courier New" pitchFamily="34" charset="0"/>
-                <a:ea typeface="Courier New" pitchFamily="34" charset="-122"/>
-                <a:cs typeface="Courier New" pitchFamily="34" charset="-120"/>
-              </a:rPr>
-              <a:t>'A'</a:t>
+                  <a:srgbClr val="4EC9B0"/>
+                </a:solidFill>
+                <a:latin typeface="Courier New" pitchFamily="34" charset="0"/>
+                <a:ea typeface="Courier New" pitchFamily="34" charset="-122"/>
+                <a:cs typeface="Courier New" pitchFamily="34" charset="-120"/>
+              </a:rPr>
+              <a:t>if_abap_behv=&gt;</a:t>
+            </a:r>
+            <a:r>
+              <a:rPr lang="en-US" sz="900" dirty="0">
+                <a:solidFill>
+                  <a:srgbClr val="CCCCCC"/>
+                </a:solidFill>
+                <a:latin typeface="Courier New" pitchFamily="34" charset="0"/>
+                <a:ea typeface="Courier New" pitchFamily="34" charset="-122"/>
+                <a:cs typeface="Courier New" pitchFamily="34" charset="-120"/>
+              </a:rPr>
+              <a:t>mk-off</a:t>
             </a:r>
             <a:endParaRPr lang="en-US" sz="900" dirty="0"/>
           </a:p>
@@ -5078,7 +5065,7 @@
                 <a:ea typeface="Courier New" pitchFamily="34" charset="-122"/>
                 <a:cs typeface="Courier New" pitchFamily="34" charset="-120"/>
               </a:rPr>
-              <a:t>        </a:t>
+              <a:t>         </a:t>
             </a:r>
             <a:r>
               <a:rPr lang="en-US" sz="900" dirty="0">
@@ -5089,7 +5076,7 @@
                 <a:ea typeface="Courier New" pitchFamily="34" charset="-122"/>
                 <a:cs typeface="Courier New" pitchFamily="34" charset="-120"/>
               </a:rPr>
-              <a:t>THEN</a:t>
+              <a:t>AND</a:t>
             </a:r>
             <a:r>
               <a:rPr lang="en-US" sz="900" dirty="0">
@@ -5105,13 +5092,57 @@
             <a:r>
               <a:rPr lang="en-US" sz="900" dirty="0">
                 <a:solidFill>
+                  <a:srgbClr val="CCCCCC"/>
+                </a:solidFill>
+                <a:latin typeface="Courier New" pitchFamily="34" charset="0"/>
+                <a:ea typeface="Courier New" pitchFamily="34" charset="-122"/>
+                <a:cs typeface="Courier New" pitchFamily="34" charset="-120"/>
+              </a:rPr>
+              <a:t>p-StatusPedido</a:t>
+            </a:r>
+            <a:r>
+              <a:rPr lang="en-US" sz="900" dirty="0">
+                <a:solidFill>
+                  <a:srgbClr val="CCCCCC"/>
+                </a:solidFill>
+                <a:latin typeface="Courier New" pitchFamily="34" charset="0"/>
+                <a:ea typeface="Courier New" pitchFamily="34" charset="-122"/>
+                <a:cs typeface="Courier New" pitchFamily="34" charset="-120"/>
+              </a:rPr>
+              <a:t> </a:t>
+            </a:r>
+            <a:r>
+              <a:rPr lang="en-US" sz="900" dirty="0">
+                <a:solidFill>
+                  <a:srgbClr val="CCCCCC"/>
+                </a:solidFill>
+                <a:latin typeface="Courier New" pitchFamily="34" charset="0"/>
+                <a:ea typeface="Courier New" pitchFamily="34" charset="-122"/>
+                <a:cs typeface="Courier New" pitchFamily="34" charset="-120"/>
+              </a:rPr>
+              <a:t>=</a:t>
+            </a:r>
+            <a:r>
+              <a:rPr lang="en-US" sz="900" dirty="0">
+                <a:solidFill>
+                  <a:srgbClr val="CCCCCC"/>
+                </a:solidFill>
+                <a:latin typeface="Courier New" pitchFamily="34" charset="0"/>
+                <a:ea typeface="Courier New" pitchFamily="34" charset="-122"/>
+                <a:cs typeface="Courier New" pitchFamily="34" charset="-120"/>
+              </a:rPr>
+              <a:t> </a:t>
+            </a:r>
+            <a:r>
+              <a:rPr lang="en-US" sz="900" dirty="0">
+                <a:solidFill>
                   <a:srgbClr val="4EC9B0"/>
                 </a:solidFill>
                 <a:latin typeface="Courier New" pitchFamily="34" charset="0"/>
                 <a:ea typeface="Courier New" pitchFamily="34" charset="-122"/>
                 <a:cs typeface="Courier New" pitchFamily="34" charset="-120"/>
               </a:rPr>
-              <a:t>if_abap_behv=&gt;</a:t>
+              <a:t>zif_pc_constants=&gt;</a:t>
             </a:r>
             <a:r>
               <a:rPr lang="en-US" sz="900" dirty="0">
@@ -5122,7 +5153,7 @@
                 <a:ea typeface="Courier New" pitchFamily="34" charset="-122"/>
                 <a:cs typeface="Courier New" pitchFamily="34" charset="-120"/>
               </a:rPr>
-              <a:t>fc-o-disabled</a:t>
+              <a:t>c_status_pedido-aguardando_aprovacao</a:t>
             </a:r>
             <a:endParaRPr lang="en-US" sz="900" dirty="0"/>
           </a:p>
@@ -5153,6 +5184,70 @@
                 <a:ea typeface="Courier New" pitchFamily="34" charset="-122"/>
                 <a:cs typeface="Courier New" pitchFamily="34" charset="-120"/>
               </a:rPr>
+              <a:t>THEN</a:t>
+            </a:r>
+            <a:r>
+              <a:rPr lang="en-US" sz="900" dirty="0">
+                <a:solidFill>
+                  <a:srgbClr val="CCCCCC"/>
+                </a:solidFill>
+                <a:latin typeface="Courier New" pitchFamily="34" charset="0"/>
+                <a:ea typeface="Courier New" pitchFamily="34" charset="-122"/>
+                <a:cs typeface="Courier New" pitchFamily="34" charset="-120"/>
+              </a:rPr>
+              <a:t> </a:t>
+            </a:r>
+            <a:r>
+              <a:rPr lang="en-US" sz="900" dirty="0">
+                <a:solidFill>
+                  <a:srgbClr val="4EC9B0"/>
+                </a:solidFill>
+                <a:latin typeface="Courier New" pitchFamily="34" charset="0"/>
+                <a:ea typeface="Courier New" pitchFamily="34" charset="-122"/>
+                <a:cs typeface="Courier New" pitchFamily="34" charset="-120"/>
+              </a:rPr>
+              <a:t>if_abap_behv=&gt;</a:t>
+            </a:r>
+            <a:r>
+              <a:rPr lang="en-US" sz="900" dirty="0">
+                <a:solidFill>
+                  <a:srgbClr val="CCCCCC"/>
+                </a:solidFill>
+                <a:latin typeface="Courier New" pitchFamily="34" charset="0"/>
+                <a:ea typeface="Courier New" pitchFamily="34" charset="-122"/>
+                <a:cs typeface="Courier New" pitchFamily="34" charset="-120"/>
+              </a:rPr>
+              <a:t>fc-o-enabled</a:t>
+            </a:r>
+            <a:endParaRPr lang="en-US" sz="900" dirty="0"/>
+          </a:p>
+          <a:p>
+            <a:pPr indent="0" marL="0">
+              <a:lnSpc>
+                <a:spcPct val="105000"/>
+              </a:lnSpc>
+              <a:buNone/>
+            </a:pPr>
+            <a:r>
+              <a:rPr lang="en-US" sz="900" dirty="0">
+                <a:solidFill>
+                  <a:srgbClr val="CCCCCC"/>
+                </a:solidFill>
+                <a:latin typeface="Courier New" pitchFamily="34" charset="0"/>
+                <a:ea typeface="Courier New" pitchFamily="34" charset="-122"/>
+                <a:cs typeface="Courier New" pitchFamily="34" charset="-120"/>
+              </a:rPr>
+              <a:t>        </a:t>
+            </a:r>
+            <a:r>
+              <a:rPr lang="en-US" sz="900" dirty="0">
+                <a:solidFill>
+                  <a:srgbClr val="569CD6"/>
+                </a:solidFill>
+                <a:latin typeface="Courier New" pitchFamily="34" charset="0"/>
+                <a:ea typeface="Courier New" pitchFamily="34" charset="-122"/>
+                <a:cs typeface="Courier New" pitchFamily="34" charset="-120"/>
+              </a:rPr>
               <a:t>ELSE</a:t>
             </a:r>
             <a:r>
@@ -5186,7 +5281,7 @@
                 <a:ea typeface="Courier New" pitchFamily="34" charset="-122"/>
                 <a:cs typeface="Courier New" pitchFamily="34" charset="-120"/>
               </a:rPr>
-              <a:t>fc-o-enabled</a:t>
+              <a:t>fc-o-disabled</a:t>
             </a:r>
             <a:r>
               <a:rPr lang="en-US" sz="900" dirty="0">
@@ -6358,7 +6453,18 @@
                   <a:srgbClr val="1D2D3E"/>
                 </a:solidFill>
               </a:rPr>
-              <a:t>Facetas podem usar um campo booleano para esconder seções</a:t>
+              <a:t>Facetas usam um campo booleano para esconder seções, como </a:t>
+            </a:r>
+            <a:r>
+              <a:rPr lang="en-US" sz="1350" dirty="0">
+                <a:solidFill>
+                  <a:srgbClr val="0064D9"/>
+                </a:solidFill>
+                <a:latin typeface="Courier New" pitchFamily="34" charset="0"/>
+                <a:ea typeface="Courier New" pitchFamily="34" charset="-122"/>
+                <a:cs typeface="Courier New" pitchFamily="34" charset="-120"/>
+              </a:rPr>
+              <a:t>hidden: #(PedidoEncerrado)</a:t>
             </a:r>
             <a:endParaRPr lang="en-US" sz="1400" dirty="0"/>
           </a:p>
@@ -6464,7 +6570,7 @@
         </p:blipFill>
         <p:spPr>
           <a:xfrm>
-            <a:off x="877824" y="2684907"/>
+            <a:off x="6562192" y="2684907"/>
             <a:ext cx="256032" cy="256032"/>
           </a:xfrm>
           <a:prstGeom prst="rect">
@@ -6488,8 +6594,8 @@
         </p:blipFill>
         <p:spPr>
           <a:xfrm>
-            <a:off x="6562192" y="2684907"/>
-            <a:ext cx="256032" cy="256032"/>
+            <a:off x="749808" y="5069205"/>
+            <a:ext cx="310896" cy="310896"/>
           </a:xfrm>
           <a:prstGeom prst="rect">
             <a:avLst/>
@@ -6512,8 +6618,8 @@
         </p:blipFill>
         <p:spPr>
           <a:xfrm>
-            <a:off x="749808" y="5069205"/>
-            <a:ext cx="310896" cy="310896"/>
+            <a:off x="877824" y="2684907"/>
+            <a:ext cx="256032" cy="256032"/>
           </a:xfrm>
           <a:prstGeom prst="rect">
             <a:avLst/>
@@ -6656,7 +6762,7 @@
                   <a:srgbClr val="FFFFFF"/>
                 </a:solidFill>
               </a:rPr>
-              <a:t>O que aprendemos na aula 03.09</a:t>
+              <a:t>O que aprendemos na aula 05.09</a:t>
             </a:r>
             <a:endParaRPr lang="en-US" sz="3200" dirty="0"/>
           </a:p>
@@ -6744,7 +6850,7 @@
                   <a:srgbClr val="FFFFFF"/>
                 </a:solidFill>
               </a:rPr>
-              <a:t> destacam preço e status no header</a:t>
+              <a:t> destacam status e valor total no header</a:t>
             </a:r>
             <a:endParaRPr lang="en-US" sz="1400" dirty="0"/>
           </a:p>
@@ -6802,7 +6908,7 @@
                   <a:srgbClr val="FFFFFF"/>
                 </a:solidFill>
               </a:rPr>
-              <a:t>O Page Editor configura o header da subobject page com título, logo e data points</a:t>
+              <a:t>O Page Editor configura o header da subobject page com título, foto e data points</a:t>
             </a:r>
             <a:endParaRPr lang="en-US" sz="1400" dirty="0"/>
           </a:p>
@@ -6890,7 +6996,7 @@
                   <a:srgbClr val="FFFFFF"/>
                 </a:solidFill>
               </a:rPr>
-              <a:t> mostra os bookings da viagem</a:t>
+              <a:t> mostra os itens do pedido</a:t>
             </a:r>
             <a:endParaRPr lang="en-US" sz="1400" dirty="0"/>
           </a:p>
@@ -6967,7 +7073,7 @@
                   <a:srgbClr val="FFFFFF"/>
                 </a:solidFill>
               </a:rPr>
-              <a:t> da entidade Booking</a:t>
+              <a:t> da entidade ItemPedido</a:t>
             </a:r>
             <a:endParaRPr lang="en-US" sz="1400" dirty="0"/>
           </a:p>
@@ -7168,7 +7274,7 @@
                   <a:srgbClr val="89D1FF"/>
                 </a:solidFill>
               </a:rPr>
-              <a:t>Próxima aula · 03.10  </a:t>
+              <a:t>Próxima aula · 05.10  </a:t>
             </a:r>
             <a:r>
               <a:rPr lang="en-US" sz="1500" dirty="0">
@@ -7445,7 +7551,7 @@
                   <a:srgbClr val="1D2D3E"/>
                 </a:solidFill>
               </a:rPr>
-              <a:t>Módulo 03 em 11 aulas: Fiori Elements com OData V4</a:t>
+              <a:t>Módulo 05 em 11 aulas: Fiori Elements com OData V4</a:t>
             </a:r>
             <a:endParaRPr lang="en-US" sz="2800" dirty="0"/>
           </a:p>
@@ -9315,7 +9421,7 @@
                   <a:srgbClr val="1D2D3E"/>
                 </a:solidFill>
               </a:rPr>
-              <a:t>deixamos a Object Page da viagem rica: KPIs no header, bookings em tabela e botões que reagem ao status.</a:t>
+              <a:t>deixamos a Object Page do pedido rica: status e total no header, itens em tabela, seções e botões que reagem ao status.</a:t>
             </a:r>
             <a:endParaRPr lang="en-US" sz="1400" dirty="0"/>
           </a:p>
@@ -9337,7 +9443,7 @@
         </p:blipFill>
         <p:spPr>
           <a:xfrm>
-            <a:off x="1696669" y="1847088"/>
+            <a:off x="3576218" y="1847088"/>
             <a:ext cx="347472" cy="347472"/>
           </a:xfrm>
           <a:prstGeom prst="rect">
@@ -9361,7 +9467,7 @@
         </p:blipFill>
         <p:spPr>
           <a:xfrm>
-            <a:off x="3576218" y="1847088"/>
+            <a:off x="5455768" y="1847088"/>
             <a:ext cx="347472" cy="347472"/>
           </a:xfrm>
           <a:prstGeom prst="rect">
@@ -9385,7 +9491,7 @@
         </p:blipFill>
         <p:spPr>
           <a:xfrm>
-            <a:off x="5455768" y="1847088"/>
+            <a:off x="1696669" y="1847088"/>
             <a:ext cx="347472" cy="347472"/>
           </a:xfrm>
           <a:prstGeom prst="rect">
@@ -9433,7 +9539,7 @@
         </p:blipFill>
         <p:spPr>
           <a:xfrm>
-            <a:off x="11094415" y="1847088"/>
+            <a:off x="9214866" y="1847088"/>
             <a:ext cx="347472" cy="347472"/>
           </a:xfrm>
           <a:prstGeom prst="rect">
@@ -9457,7 +9563,7 @@
         </p:blipFill>
         <p:spPr>
           <a:xfrm>
-            <a:off x="9214866" y="1847088"/>
+            <a:off x="11094415" y="1847088"/>
             <a:ext cx="347472" cy="347472"/>
           </a:xfrm>
           <a:prstGeom prst="rect">
@@ -9481,7 +9587,7 @@
         </p:blipFill>
         <p:spPr>
           <a:xfrm>
-            <a:off x="1696669" y="3858768"/>
+            <a:off x="3576218" y="3858768"/>
             <a:ext cx="347472" cy="347472"/>
           </a:xfrm>
           <a:prstGeom prst="rect">
@@ -9505,7 +9611,7 @@
         </p:blipFill>
         <p:spPr>
           <a:xfrm>
-            <a:off x="3576218" y="3858768"/>
+            <a:off x="1696669" y="3858768"/>
             <a:ext cx="347472" cy="347472"/>
           </a:xfrm>
           <a:prstGeom prst="rect">
@@ -9942,7 +10048,7 @@
                   <a:srgbClr val="556B82"/>
                 </a:solidFill>
               </a:rPr>
-              <a:t>Preço total e status em destaque, com cor.</a:t>
+              <a:t>Status do pedido, pagamento e valor total em destaque, com cor.</a:t>
             </a:r>
             <a:endParaRPr lang="en-US" sz="1400" dirty="0"/>
           </a:p>
@@ -10051,7 +10157,7 @@
                   <a:srgbClr val="556B82"/>
                 </a:solidFill>
               </a:rPr>
-              <a:t>Bookings da viagem, com navegação para o detalhe.</a:t>
+              <a:t>Itens do pedido, com navegação para o detalhe.</a:t>
             </a:r>
             <a:endParaRPr lang="en-US" sz="1400" dirty="0"/>
           </a:p>
@@ -10206,7 +10312,7 @@
         </p:blipFill>
         <p:spPr>
           <a:xfrm>
-            <a:off x="8399069" y="3525266"/>
+            <a:off x="4624730" y="3525266"/>
             <a:ext cx="256032" cy="256032"/>
           </a:xfrm>
           <a:prstGeom prst="rect">
@@ -10230,7 +10336,7 @@
         </p:blipFill>
         <p:spPr>
           <a:xfrm>
-            <a:off x="4624730" y="3525266"/>
+            <a:off x="8399069" y="3525266"/>
             <a:ext cx="256032" cy="256032"/>
           </a:xfrm>
           <a:prstGeom prst="rect">
@@ -10360,7 +10466,7 @@
                   <a:srgbClr val="89D1FF"/>
                 </a:solidFill>
               </a:rPr>
-              <a:t>AULA 03.09 · SEÇÃO 1</a:t>
+              <a:t>AULA 05.09 · SEÇÃO 1</a:t>
             </a:r>
             <a:endParaRPr lang="en-US" sz="1300" dirty="0"/>
           </a:p>
@@ -10800,7 +10906,7 @@
                   <a:srgbClr val="0064D9"/>
                 </a:solidFill>
               </a:rPr>
-              <a:t>HEADER · EXERCÍCIO DO CURSO</a:t>
+              <a:t>HEADER · NO PROJETO</a:t>
             </a:r>
             <a:endParaRPr lang="en-US" sz="1100" dirty="0"/>
           </a:p>
@@ -10838,7 +10944,7 @@
                   <a:srgbClr val="1D2D3E"/>
                 </a:solidFill>
               </a:rPr>
-              <a:t>Preço e status no header da viagem</a:t>
+              <a:t>Status e total no header do pedido</a:t>
             </a:r>
             <a:endParaRPr lang="en-US" sz="2800" dirty="0"/>
           </a:p>
@@ -10902,7 +11008,7 @@
         <p:spPr>
           <a:xfrm>
             <a:off x="640080" y="1700784"/>
-            <a:ext cx="2852928" cy="292608"/>
+            <a:ext cx="2619756" cy="292608"/>
           </a:xfrm>
           <a:prstGeom prst="rect">
             <a:avLst/>
@@ -10922,7 +11028,7 @@
         <p:spPr>
           <a:xfrm>
             <a:off x="640080" y="1700784"/>
-            <a:ext cx="2852928" cy="27432"/>
+            <a:ext cx="2619756" cy="27432"/>
           </a:xfrm>
           <a:prstGeom prst="rect">
             <a:avLst/>
@@ -10942,7 +11048,7 @@
         <p:spPr>
           <a:xfrm>
             <a:off x="731520" y="1719072"/>
-            <a:ext cx="2670048" cy="274320"/>
+            <a:ext cx="2436876" cy="274320"/>
           </a:xfrm>
           <a:prstGeom prst="rect">
             <a:avLst/>
@@ -10963,7 +11069,7 @@
                   <a:srgbClr val="FFFFFF"/>
                 </a:solidFill>
               </a:rPr>
-              <a:t>zc_fe_travel_######.ddlx.asddlxs</a:t>
+              <a:t>zc_pc_pedido_app.ddlx.asddlxs</a:t>
             </a:r>
             <a:endParaRPr lang="en-US" sz="950" dirty="0"/>
           </a:p>
@@ -10999,7 +11105,7 @@
                   <a:srgbClr val="9DA5B4"/>
                 </a:solidFill>
               </a:rPr>
-              <a:t>ZFE_TRAVEL_###### › Metadata Extensions</a:t>
+              <a:t>ZAVBS_PC_PEDIDOS › ZC_PC_PEDIDO_APP (trecho)</a:t>
             </a:r>
             <a:endParaRPr lang="en-US" sz="850" dirty="0"/>
           </a:p>
@@ -11442,6 +11548,72 @@
                 <a:ea typeface="Courier New" pitchFamily="34" charset="-122"/>
                 <a:cs typeface="Courier New" pitchFamily="34" charset="-120"/>
               </a:rPr>
+              <a:t>id</a:t>
+            </a:r>
+            <a:r>
+              <a:rPr lang="en-US" sz="1050" dirty="0">
+                <a:solidFill>
+                  <a:srgbClr val="CCCCCC"/>
+                </a:solidFill>
+                <a:latin typeface="Courier New" pitchFamily="34" charset="0"/>
+                <a:ea typeface="Courier New" pitchFamily="34" charset="-122"/>
+                <a:cs typeface="Courier New" pitchFamily="34" charset="-120"/>
+              </a:rPr>
+              <a:t>:</a:t>
+            </a:r>
+            <a:r>
+              <a:rPr lang="en-US" sz="1050" dirty="0">
+                <a:solidFill>
+                  <a:srgbClr val="CCCCCC"/>
+                </a:solidFill>
+                <a:latin typeface="Courier New" pitchFamily="34" charset="0"/>
+                <a:ea typeface="Courier New" pitchFamily="34" charset="-122"/>
+                <a:cs typeface="Courier New" pitchFamily="34" charset="-120"/>
+              </a:rPr>
+              <a:t> </a:t>
+            </a:r>
+            <a:r>
+              <a:rPr lang="en-US" sz="1050" dirty="0">
+                <a:solidFill>
+                  <a:srgbClr val="CE9178"/>
+                </a:solidFill>
+                <a:latin typeface="Courier New" pitchFamily="34" charset="0"/>
+                <a:ea typeface="Courier New" pitchFamily="34" charset="-122"/>
+                <a:cs typeface="Courier New" pitchFamily="34" charset="-120"/>
+              </a:rPr>
+              <a:t>'HeaderStatus'</a:t>
+            </a:r>
+            <a:r>
+              <a:rPr lang="en-US" sz="1050" dirty="0">
+                <a:solidFill>
+                  <a:srgbClr val="CCCCCC"/>
+                </a:solidFill>
+                <a:latin typeface="Courier New" pitchFamily="34" charset="0"/>
+                <a:ea typeface="Courier New" pitchFamily="34" charset="-122"/>
+                <a:cs typeface="Courier New" pitchFamily="34" charset="-120"/>
+              </a:rPr>
+              <a:t>,</a:t>
+            </a:r>
+            <a:r>
+              <a:rPr lang="en-US" sz="1050" dirty="0">
+                <a:solidFill>
+                  <a:srgbClr val="CCCCCC"/>
+                </a:solidFill>
+                <a:latin typeface="Courier New" pitchFamily="34" charset="0"/>
+                <a:ea typeface="Courier New" pitchFamily="34" charset="-122"/>
+                <a:cs typeface="Courier New" pitchFamily="34" charset="-120"/>
+              </a:rPr>
+              <a:t> </a:t>
+            </a:r>
+            <a:r>
+              <a:rPr lang="en-US" sz="1050" dirty="0">
+                <a:solidFill>
+                  <a:srgbClr val="CCCCCC"/>
+                </a:solidFill>
+                <a:latin typeface="Courier New" pitchFamily="34" charset="0"/>
+                <a:ea typeface="Courier New" pitchFamily="34" charset="-122"/>
+                <a:cs typeface="Courier New" pitchFamily="34" charset="-120"/>
+              </a:rPr>
               <a:t>purpose</a:t>
             </a:r>
             <a:r>
@@ -11704,7 +11876,7 @@
                 <a:ea typeface="Courier New" pitchFamily="34" charset="-122"/>
                 <a:cs typeface="Courier New" pitchFamily="34" charset="-120"/>
               </a:rPr>
-              <a:t>'PriceData'</a:t>
+              <a:t>'StatusPedido'</a:t>
             </a:r>
             <a:r>
               <a:rPr lang="en-US" sz="1050" dirty="0">
@@ -11790,6 +11962,72 @@
                 <a:ea typeface="Courier New" pitchFamily="34" charset="-122"/>
                 <a:cs typeface="Courier New" pitchFamily="34" charset="-120"/>
               </a:rPr>
+              <a:t>id</a:t>
+            </a:r>
+            <a:r>
+              <a:rPr lang="en-US" sz="1050" dirty="0">
+                <a:solidFill>
+                  <a:srgbClr val="CCCCCC"/>
+                </a:solidFill>
+                <a:latin typeface="Courier New" pitchFamily="34" charset="0"/>
+                <a:ea typeface="Courier New" pitchFamily="34" charset="-122"/>
+                <a:cs typeface="Courier New" pitchFamily="34" charset="-120"/>
+              </a:rPr>
+              <a:t>:</a:t>
+            </a:r>
+            <a:r>
+              <a:rPr lang="en-US" sz="1050" dirty="0">
+                <a:solidFill>
+                  <a:srgbClr val="CCCCCC"/>
+                </a:solidFill>
+                <a:latin typeface="Courier New" pitchFamily="34" charset="0"/>
+                <a:ea typeface="Courier New" pitchFamily="34" charset="-122"/>
+                <a:cs typeface="Courier New" pitchFamily="34" charset="-120"/>
+              </a:rPr>
+              <a:t> </a:t>
+            </a:r>
+            <a:r>
+              <a:rPr lang="en-US" sz="1050" dirty="0">
+                <a:solidFill>
+                  <a:srgbClr val="CE9178"/>
+                </a:solidFill>
+                <a:latin typeface="Courier New" pitchFamily="34" charset="0"/>
+                <a:ea typeface="Courier New" pitchFamily="34" charset="-122"/>
+                <a:cs typeface="Courier New" pitchFamily="34" charset="-120"/>
+              </a:rPr>
+              <a:t>'HeaderTotal'</a:t>
+            </a:r>
+            <a:r>
+              <a:rPr lang="en-US" sz="1050" dirty="0">
+                <a:solidFill>
+                  <a:srgbClr val="CCCCCC"/>
+                </a:solidFill>
+                <a:latin typeface="Courier New" pitchFamily="34" charset="0"/>
+                <a:ea typeface="Courier New" pitchFamily="34" charset="-122"/>
+                <a:cs typeface="Courier New" pitchFamily="34" charset="-120"/>
+              </a:rPr>
+              <a:t>,</a:t>
+            </a:r>
+            <a:r>
+              <a:rPr lang="en-US" sz="1050" dirty="0">
+                <a:solidFill>
+                  <a:srgbClr val="CCCCCC"/>
+                </a:solidFill>
+                <a:latin typeface="Courier New" pitchFamily="34" charset="0"/>
+                <a:ea typeface="Courier New" pitchFamily="34" charset="-122"/>
+                <a:cs typeface="Courier New" pitchFamily="34" charset="-120"/>
+              </a:rPr>
+              <a:t>  </a:t>
+            </a:r>
+            <a:r>
+              <a:rPr lang="en-US" sz="1050" dirty="0">
+                <a:solidFill>
+                  <a:srgbClr val="CCCCCC"/>
+                </a:solidFill>
+                <a:latin typeface="Courier New" pitchFamily="34" charset="0"/>
+                <a:ea typeface="Courier New" pitchFamily="34" charset="-122"/>
+                <a:cs typeface="Courier New" pitchFamily="34" charset="-120"/>
+              </a:rPr>
               <a:t>purpose</a:t>
             </a:r>
             <a:r>
@@ -11900,7 +12138,7 @@
                 <a:ea typeface="Courier New" pitchFamily="34" charset="-122"/>
                 <a:cs typeface="Courier New" pitchFamily="34" charset="-120"/>
               </a:rPr>
-              <a:t>20</a:t>
+              <a:t>30</a:t>
             </a:r>
             <a:r>
               <a:rPr lang="en-US" sz="1050" dirty="0">
@@ -12052,7 +12290,7 @@
                 <a:ea typeface="Courier New" pitchFamily="34" charset="-122"/>
                 <a:cs typeface="Courier New" pitchFamily="34" charset="-120"/>
               </a:rPr>
-              <a:t>'StatusData'</a:t>
+              <a:t>'ValorTotal'</a:t>
             </a:r>
             <a:r>
               <a:rPr lang="en-US" sz="1050" dirty="0">
@@ -12255,7 +12493,7 @@
                 <a:ea typeface="Courier New" pitchFamily="34" charset="-122"/>
                 <a:cs typeface="Courier New" pitchFamily="34" charset="-120"/>
               </a:rPr>
-              <a:t>'PriceData'</a:t>
+              <a:t>'StatusPedido'</a:t>
             </a:r>
             <a:r>
               <a:rPr lang="en-US" sz="1050" dirty="0">
@@ -12321,29 +12559,18 @@
                 <a:ea typeface="Courier New" pitchFamily="34" charset="-122"/>
                 <a:cs typeface="Courier New" pitchFamily="34" charset="-120"/>
               </a:rPr>
-              <a:t>'Total Price'</a:t>
-            </a:r>
-            <a:r>
-              <a:rPr lang="en-US" sz="1050" dirty="0">
-                <a:solidFill>
-                  <a:srgbClr val="CCCCCC"/>
-                </a:solidFill>
-                <a:latin typeface="Courier New" pitchFamily="34" charset="0"/>
-                <a:ea typeface="Courier New" pitchFamily="34" charset="-122"/>
-                <a:cs typeface="Courier New" pitchFamily="34" charset="-120"/>
-              </a:rPr>
-              <a:t> </a:t>
-            </a:r>
-            <a:r>
-              <a:rPr lang="en-US" sz="1050" dirty="0">
-                <a:solidFill>
-                  <a:srgbClr val="CCCCCC"/>
-                </a:solidFill>
-                <a:latin typeface="Courier New" pitchFamily="34" charset="0"/>
-                <a:ea typeface="Courier New" pitchFamily="34" charset="-122"/>
-                <a:cs typeface="Courier New" pitchFamily="34" charset="-120"/>
-              </a:rPr>
-              <a:t>}</a:t>
+              <a:t>'Status do pedido'</a:t>
+            </a:r>
+            <a:r>
+              <a:rPr lang="en-US" sz="1050" dirty="0">
+                <a:solidFill>
+                  <a:srgbClr val="CCCCCC"/>
+                </a:solidFill>
+                <a:latin typeface="Courier New" pitchFamily="34" charset="0"/>
+                <a:ea typeface="Courier New" pitchFamily="34" charset="-122"/>
+                <a:cs typeface="Courier New" pitchFamily="34" charset="-120"/>
+              </a:rPr>
+              <a:t>,</a:t>
             </a:r>
             <a:endParaRPr lang="en-US" sz="1050" dirty="0"/>
           </a:p>
@@ -12363,18 +12590,73 @@
                 <a:ea typeface="Courier New" pitchFamily="34" charset="-122"/>
                 <a:cs typeface="Courier New" pitchFamily="34" charset="-120"/>
               </a:rPr>
-              <a:t>TotalPrice</a:t>
-            </a:r>
-            <a:r>
-              <a:rPr lang="en-US" sz="1050" dirty="0">
-                <a:solidFill>
-                  <a:srgbClr val="CCCCCC"/>
-                </a:solidFill>
-                <a:latin typeface="Courier New" pitchFamily="34" charset="0"/>
-                <a:ea typeface="Courier New" pitchFamily="34" charset="-122"/>
-                <a:cs typeface="Courier New" pitchFamily="34" charset="-120"/>
-              </a:rPr>
-              <a:t>;</a:t>
+              <a:t>                 </a:t>
+            </a:r>
+            <a:r>
+              <a:rPr lang="en-US" sz="1050" dirty="0">
+                <a:solidFill>
+                  <a:srgbClr val="CCCCCC"/>
+                </a:solidFill>
+                <a:latin typeface="Courier New" pitchFamily="34" charset="0"/>
+                <a:ea typeface="Courier New" pitchFamily="34" charset="-122"/>
+                <a:cs typeface="Courier New" pitchFamily="34" charset="-120"/>
+              </a:rPr>
+              <a:t>criticality</a:t>
+            </a:r>
+            <a:r>
+              <a:rPr lang="en-US" sz="1050" dirty="0">
+                <a:solidFill>
+                  <a:srgbClr val="CCCCCC"/>
+                </a:solidFill>
+                <a:latin typeface="Courier New" pitchFamily="34" charset="0"/>
+                <a:ea typeface="Courier New" pitchFamily="34" charset="-122"/>
+                <a:cs typeface="Courier New" pitchFamily="34" charset="-120"/>
+              </a:rPr>
+              <a:t>:</a:t>
+            </a:r>
+            <a:r>
+              <a:rPr lang="en-US" sz="1050" dirty="0">
+                <a:solidFill>
+                  <a:srgbClr val="CCCCCC"/>
+                </a:solidFill>
+                <a:latin typeface="Courier New" pitchFamily="34" charset="0"/>
+                <a:ea typeface="Courier New" pitchFamily="34" charset="-122"/>
+                <a:cs typeface="Courier New" pitchFamily="34" charset="-120"/>
+              </a:rPr>
+              <a:t> </a:t>
+            </a:r>
+            <a:r>
+              <a:rPr lang="en-US" sz="1050" dirty="0">
+                <a:solidFill>
+                  <a:srgbClr val="CE9178"/>
+                </a:solidFill>
+                <a:latin typeface="Courier New" pitchFamily="34" charset="0"/>
+                <a:ea typeface="Courier New" pitchFamily="34" charset="-122"/>
+                <a:cs typeface="Courier New" pitchFamily="34" charset="-120"/>
+              </a:rPr>
+              <a:t>'StatusPedidoCriticality'</a:t>
+            </a:r>
+            <a:r>
+              <a:rPr lang="en-US" sz="1050" dirty="0">
+                <a:solidFill>
+                  <a:srgbClr val="CCCCCC"/>
+                </a:solidFill>
+                <a:latin typeface="Courier New" pitchFamily="34" charset="0"/>
+                <a:ea typeface="Courier New" pitchFamily="34" charset="-122"/>
+                <a:cs typeface="Courier New" pitchFamily="34" charset="-120"/>
+              </a:rPr>
+              <a:t> </a:t>
+            </a:r>
+            <a:r>
+              <a:rPr lang="en-US" sz="1050" dirty="0">
+                <a:solidFill>
+                  <a:srgbClr val="CCCCCC"/>
+                </a:solidFill>
+                <a:latin typeface="Courier New" pitchFamily="34" charset="0"/>
+                <a:ea typeface="Courier New" pitchFamily="34" charset="-122"/>
+                <a:cs typeface="Courier New" pitchFamily="34" charset="-120"/>
+              </a:rPr>
+              <a:t>}</a:t>
             </a:r>
             <a:endParaRPr lang="en-US" sz="1050" dirty="0"/>
           </a:p>
@@ -12388,13 +12670,24 @@
             <a:r>
               <a:rPr lang="en-US" sz="1050" dirty="0">
                 <a:solidFill>
-                  <a:srgbClr val="000000"/>
-                </a:solidFill>
-                <a:latin typeface="Courier New" pitchFamily="34" charset="0"/>
-                <a:ea typeface="Courier New" pitchFamily="34" charset="-122"/>
-                <a:cs typeface="Courier New" pitchFamily="34" charset="-120"/>
-              </a:rPr>
-              <a:t> </a:t>
+                  <a:srgbClr val="CCCCCC"/>
+                </a:solidFill>
+                <a:latin typeface="Courier New" pitchFamily="34" charset="0"/>
+                <a:ea typeface="Courier New" pitchFamily="34" charset="-122"/>
+                <a:cs typeface="Courier New" pitchFamily="34" charset="-120"/>
+              </a:rPr>
+              <a:t>StatusPedido</a:t>
+            </a:r>
+            <a:r>
+              <a:rPr lang="en-US" sz="1050" dirty="0">
+                <a:solidFill>
+                  <a:srgbClr val="CCCCCC"/>
+                </a:solidFill>
+                <a:latin typeface="Courier New" pitchFamily="34" charset="0"/>
+                <a:ea typeface="Courier New" pitchFamily="34" charset="-122"/>
+                <a:cs typeface="Courier New" pitchFamily="34" charset="-120"/>
+              </a:rPr>
+              <a:t>;</a:t>
             </a:r>
             <a:endParaRPr lang="en-US" sz="1050" dirty="0"/>
           </a:p>
@@ -12408,211 +12701,13 @@
             <a:r>
               <a:rPr lang="en-US" sz="1050" dirty="0">
                 <a:solidFill>
-                  <a:srgbClr val="CCCCCC"/>
-                </a:solidFill>
-                <a:latin typeface="Courier New" pitchFamily="34" charset="0"/>
-                <a:ea typeface="Courier New" pitchFamily="34" charset="-122"/>
-                <a:cs typeface="Courier New" pitchFamily="34" charset="-120"/>
-              </a:rPr>
-              <a:t>@</a:t>
-            </a:r>
-            <a:r>
-              <a:rPr lang="en-US" sz="1050" dirty="0">
-                <a:solidFill>
-                  <a:srgbClr val="CCCCCC"/>
-                </a:solidFill>
-                <a:latin typeface="Courier New" pitchFamily="34" charset="0"/>
-                <a:ea typeface="Courier New" pitchFamily="34" charset="-122"/>
-                <a:cs typeface="Courier New" pitchFamily="34" charset="-120"/>
-              </a:rPr>
-              <a:t>UI</a:t>
-            </a:r>
-            <a:r>
-              <a:rPr lang="en-US" sz="1050" dirty="0">
-                <a:solidFill>
-                  <a:srgbClr val="CCCCCC"/>
-                </a:solidFill>
-                <a:latin typeface="Courier New" pitchFamily="34" charset="0"/>
-                <a:ea typeface="Courier New" pitchFamily="34" charset="-122"/>
-                <a:cs typeface="Courier New" pitchFamily="34" charset="-120"/>
-              </a:rPr>
-              <a:t>.</a:t>
-            </a:r>
-            <a:r>
-              <a:rPr lang="en-US" sz="1050" dirty="0">
-                <a:solidFill>
-                  <a:srgbClr val="CCCCCC"/>
-                </a:solidFill>
-                <a:latin typeface="Courier New" pitchFamily="34" charset="0"/>
-                <a:ea typeface="Courier New" pitchFamily="34" charset="-122"/>
-                <a:cs typeface="Courier New" pitchFamily="34" charset="-120"/>
-              </a:rPr>
-              <a:t>dataPoint</a:t>
-            </a:r>
-            <a:r>
-              <a:rPr lang="en-US" sz="1050" dirty="0">
-                <a:solidFill>
-                  <a:srgbClr val="CCCCCC"/>
-                </a:solidFill>
-                <a:latin typeface="Courier New" pitchFamily="34" charset="0"/>
-                <a:ea typeface="Courier New" pitchFamily="34" charset="-122"/>
-                <a:cs typeface="Courier New" pitchFamily="34" charset="-120"/>
-              </a:rPr>
-              <a:t>:</a:t>
-            </a:r>
-            <a:r>
-              <a:rPr lang="en-US" sz="1050" dirty="0">
-                <a:solidFill>
-                  <a:srgbClr val="CCCCCC"/>
+                  <a:srgbClr val="000000"/>
                 </a:solidFill>
                 <a:latin typeface="Courier New" pitchFamily="34" charset="0"/>
                 <a:ea typeface="Courier New" pitchFamily="34" charset="-122"/>
                 <a:cs typeface="Courier New" pitchFamily="34" charset="-120"/>
               </a:rPr>
               <a:t> </a:t>
-            </a:r>
-            <a:r>
-              <a:rPr lang="en-US" sz="1050" dirty="0">
-                <a:solidFill>
-                  <a:srgbClr val="CCCCCC"/>
-                </a:solidFill>
-                <a:latin typeface="Courier New" pitchFamily="34" charset="0"/>
-                <a:ea typeface="Courier New" pitchFamily="34" charset="-122"/>
-                <a:cs typeface="Courier New" pitchFamily="34" charset="-120"/>
-              </a:rPr>
-              <a:t>{</a:t>
-            </a:r>
-            <a:r>
-              <a:rPr lang="en-US" sz="1050" dirty="0">
-                <a:solidFill>
-                  <a:srgbClr val="CCCCCC"/>
-                </a:solidFill>
-                <a:latin typeface="Courier New" pitchFamily="34" charset="0"/>
-                <a:ea typeface="Courier New" pitchFamily="34" charset="-122"/>
-                <a:cs typeface="Courier New" pitchFamily="34" charset="-120"/>
-              </a:rPr>
-              <a:t> </a:t>
-            </a:r>
-            <a:r>
-              <a:rPr lang="en-US" sz="1050" dirty="0">
-                <a:solidFill>
-                  <a:srgbClr val="CCCCCC"/>
-                </a:solidFill>
-                <a:latin typeface="Courier New" pitchFamily="34" charset="0"/>
-                <a:ea typeface="Courier New" pitchFamily="34" charset="-122"/>
-                <a:cs typeface="Courier New" pitchFamily="34" charset="-120"/>
-              </a:rPr>
-              <a:t>qualifier</a:t>
-            </a:r>
-            <a:r>
-              <a:rPr lang="en-US" sz="1050" dirty="0">
-                <a:solidFill>
-                  <a:srgbClr val="CCCCCC"/>
-                </a:solidFill>
-                <a:latin typeface="Courier New" pitchFamily="34" charset="0"/>
-                <a:ea typeface="Courier New" pitchFamily="34" charset="-122"/>
-                <a:cs typeface="Courier New" pitchFamily="34" charset="-120"/>
-              </a:rPr>
-              <a:t>:</a:t>
-            </a:r>
-            <a:r>
-              <a:rPr lang="en-US" sz="1050" dirty="0">
-                <a:solidFill>
-                  <a:srgbClr val="CCCCCC"/>
-                </a:solidFill>
-                <a:latin typeface="Courier New" pitchFamily="34" charset="0"/>
-                <a:ea typeface="Courier New" pitchFamily="34" charset="-122"/>
-                <a:cs typeface="Courier New" pitchFamily="34" charset="-120"/>
-              </a:rPr>
-              <a:t> </a:t>
-            </a:r>
-            <a:r>
-              <a:rPr lang="en-US" sz="1050" dirty="0">
-                <a:solidFill>
-                  <a:srgbClr val="CE9178"/>
-                </a:solidFill>
-                <a:latin typeface="Courier New" pitchFamily="34" charset="0"/>
-                <a:ea typeface="Courier New" pitchFamily="34" charset="-122"/>
-                <a:cs typeface="Courier New" pitchFamily="34" charset="-120"/>
-              </a:rPr>
-              <a:t>'StatusData'</a:t>
-            </a:r>
-            <a:r>
-              <a:rPr lang="en-US" sz="1050" dirty="0">
-                <a:solidFill>
-                  <a:srgbClr val="CCCCCC"/>
-                </a:solidFill>
-                <a:latin typeface="Courier New" pitchFamily="34" charset="0"/>
-                <a:ea typeface="Courier New" pitchFamily="34" charset="-122"/>
-                <a:cs typeface="Courier New" pitchFamily="34" charset="-120"/>
-              </a:rPr>
-              <a:t>,</a:t>
-            </a:r>
-            <a:r>
-              <a:rPr lang="en-US" sz="1050" dirty="0">
-                <a:solidFill>
-                  <a:srgbClr val="CCCCCC"/>
-                </a:solidFill>
-                <a:latin typeface="Courier New" pitchFamily="34" charset="0"/>
-                <a:ea typeface="Courier New" pitchFamily="34" charset="-122"/>
-                <a:cs typeface="Courier New" pitchFamily="34" charset="-120"/>
-              </a:rPr>
-              <a:t> </a:t>
-            </a:r>
-            <a:r>
-              <a:rPr lang="en-US" sz="1050" dirty="0">
-                <a:solidFill>
-                  <a:srgbClr val="CCCCCC"/>
-                </a:solidFill>
-                <a:latin typeface="Courier New" pitchFamily="34" charset="0"/>
-                <a:ea typeface="Courier New" pitchFamily="34" charset="-122"/>
-                <a:cs typeface="Courier New" pitchFamily="34" charset="-120"/>
-              </a:rPr>
-              <a:t>title</a:t>
-            </a:r>
-            <a:r>
-              <a:rPr lang="en-US" sz="1050" dirty="0">
-                <a:solidFill>
-                  <a:srgbClr val="CCCCCC"/>
-                </a:solidFill>
-                <a:latin typeface="Courier New" pitchFamily="34" charset="0"/>
-                <a:ea typeface="Courier New" pitchFamily="34" charset="-122"/>
-                <a:cs typeface="Courier New" pitchFamily="34" charset="-120"/>
-              </a:rPr>
-              <a:t>:</a:t>
-            </a:r>
-            <a:r>
-              <a:rPr lang="en-US" sz="1050" dirty="0">
-                <a:solidFill>
-                  <a:srgbClr val="CCCCCC"/>
-                </a:solidFill>
-                <a:latin typeface="Courier New" pitchFamily="34" charset="0"/>
-                <a:ea typeface="Courier New" pitchFamily="34" charset="-122"/>
-                <a:cs typeface="Courier New" pitchFamily="34" charset="-120"/>
-              </a:rPr>
-              <a:t> </a:t>
-            </a:r>
-            <a:r>
-              <a:rPr lang="en-US" sz="1050" dirty="0">
-                <a:solidFill>
-                  <a:srgbClr val="CE9178"/>
-                </a:solidFill>
-                <a:latin typeface="Courier New" pitchFamily="34" charset="0"/>
-                <a:ea typeface="Courier New" pitchFamily="34" charset="-122"/>
-                <a:cs typeface="Courier New" pitchFamily="34" charset="-120"/>
-              </a:rPr>
-              <a:t>'Status'</a:t>
-            </a:r>
-            <a:r>
-              <a:rPr lang="en-US" sz="1050" dirty="0">
-                <a:solidFill>
-                  <a:srgbClr val="CCCCCC"/>
-                </a:solidFill>
-                <a:latin typeface="Courier New" pitchFamily="34" charset="0"/>
-                <a:ea typeface="Courier New" pitchFamily="34" charset="-122"/>
-                <a:cs typeface="Courier New" pitchFamily="34" charset="-120"/>
-              </a:rPr>
-              <a:t>,</a:t>
             </a:r>
             <a:endParaRPr lang="en-US" sz="1050" dirty="0"/>
           </a:p>
@@ -12632,18 +12727,40 @@
                 <a:ea typeface="Courier New" pitchFamily="34" charset="-122"/>
                 <a:cs typeface="Courier New" pitchFamily="34" charset="-120"/>
               </a:rPr>
-              <a:t>                 </a:t>
-            </a:r>
-            <a:r>
-              <a:rPr lang="en-US" sz="1050" dirty="0">
-                <a:solidFill>
-                  <a:srgbClr val="CCCCCC"/>
-                </a:solidFill>
-                <a:latin typeface="Courier New" pitchFamily="34" charset="0"/>
-                <a:ea typeface="Courier New" pitchFamily="34" charset="-122"/>
-                <a:cs typeface="Courier New" pitchFamily="34" charset="-120"/>
-              </a:rPr>
-              <a:t>criticality</a:t>
+              <a:t>@</a:t>
+            </a:r>
+            <a:r>
+              <a:rPr lang="en-US" sz="1050" dirty="0">
+                <a:solidFill>
+                  <a:srgbClr val="CCCCCC"/>
+                </a:solidFill>
+                <a:latin typeface="Courier New" pitchFamily="34" charset="0"/>
+                <a:ea typeface="Courier New" pitchFamily="34" charset="-122"/>
+                <a:cs typeface="Courier New" pitchFamily="34" charset="-120"/>
+              </a:rPr>
+              <a:t>UI</a:t>
+            </a:r>
+            <a:r>
+              <a:rPr lang="en-US" sz="1050" dirty="0">
+                <a:solidFill>
+                  <a:srgbClr val="CCCCCC"/>
+                </a:solidFill>
+                <a:latin typeface="Courier New" pitchFamily="34" charset="0"/>
+                <a:ea typeface="Courier New" pitchFamily="34" charset="-122"/>
+                <a:cs typeface="Courier New" pitchFamily="34" charset="-120"/>
+              </a:rPr>
+              <a:t>.</a:t>
+            </a:r>
+            <a:r>
+              <a:rPr lang="en-US" sz="1050" dirty="0">
+                <a:solidFill>
+                  <a:srgbClr val="CCCCCC"/>
+                </a:solidFill>
+                <a:latin typeface="Courier New" pitchFamily="34" charset="0"/>
+                <a:ea typeface="Courier New" pitchFamily="34" charset="-122"/>
+                <a:cs typeface="Courier New" pitchFamily="34" charset="-120"/>
+              </a:rPr>
+              <a:t>dataPoint</a:t>
             </a:r>
             <a:r>
               <a:rPr lang="en-US" sz="1050" dirty="0">
@@ -12670,13 +12787,134 @@
             <a:r>
               <a:rPr lang="en-US" sz="1050" dirty="0">
                 <a:solidFill>
+                  <a:srgbClr val="CCCCCC"/>
+                </a:solidFill>
+                <a:latin typeface="Courier New" pitchFamily="34" charset="0"/>
+                <a:ea typeface="Courier New" pitchFamily="34" charset="-122"/>
+                <a:cs typeface="Courier New" pitchFamily="34" charset="-120"/>
+              </a:rPr>
+              <a:t>{</a:t>
+            </a:r>
+            <a:r>
+              <a:rPr lang="en-US" sz="1050" dirty="0">
+                <a:solidFill>
+                  <a:srgbClr val="CCCCCC"/>
+                </a:solidFill>
+                <a:latin typeface="Courier New" pitchFamily="34" charset="0"/>
+                <a:ea typeface="Courier New" pitchFamily="34" charset="-122"/>
+                <a:cs typeface="Courier New" pitchFamily="34" charset="-120"/>
+              </a:rPr>
+              <a:t> </a:t>
+            </a:r>
+            <a:r>
+              <a:rPr lang="en-US" sz="1050" dirty="0">
+                <a:solidFill>
+                  <a:srgbClr val="CCCCCC"/>
+                </a:solidFill>
+                <a:latin typeface="Courier New" pitchFamily="34" charset="0"/>
+                <a:ea typeface="Courier New" pitchFamily="34" charset="-122"/>
+                <a:cs typeface="Courier New" pitchFamily="34" charset="-120"/>
+              </a:rPr>
+              <a:t>qualifier</a:t>
+            </a:r>
+            <a:r>
+              <a:rPr lang="en-US" sz="1050" dirty="0">
+                <a:solidFill>
+                  <a:srgbClr val="CCCCCC"/>
+                </a:solidFill>
+                <a:latin typeface="Courier New" pitchFamily="34" charset="0"/>
+                <a:ea typeface="Courier New" pitchFamily="34" charset="-122"/>
+                <a:cs typeface="Courier New" pitchFamily="34" charset="-120"/>
+              </a:rPr>
+              <a:t>:</a:t>
+            </a:r>
+            <a:r>
+              <a:rPr lang="en-US" sz="1050" dirty="0">
+                <a:solidFill>
+                  <a:srgbClr val="CCCCCC"/>
+                </a:solidFill>
+                <a:latin typeface="Courier New" pitchFamily="34" charset="0"/>
+                <a:ea typeface="Courier New" pitchFamily="34" charset="-122"/>
+                <a:cs typeface="Courier New" pitchFamily="34" charset="-120"/>
+              </a:rPr>
+              <a:t> </a:t>
+            </a:r>
+            <a:r>
+              <a:rPr lang="en-US" sz="1050" dirty="0">
+                <a:solidFill>
                   <a:srgbClr val="CE9178"/>
                 </a:solidFill>
                 <a:latin typeface="Courier New" pitchFamily="34" charset="0"/>
                 <a:ea typeface="Courier New" pitchFamily="34" charset="-122"/>
                 <a:cs typeface="Courier New" pitchFamily="34" charset="-120"/>
               </a:rPr>
-              <a:t>'OverallStatusCriticality'</a:t>
+              <a:t>'ValorTotal'</a:t>
+            </a:r>
+            <a:r>
+              <a:rPr lang="en-US" sz="1050" dirty="0">
+                <a:solidFill>
+                  <a:srgbClr val="CCCCCC"/>
+                </a:solidFill>
+                <a:latin typeface="Courier New" pitchFamily="34" charset="0"/>
+                <a:ea typeface="Courier New" pitchFamily="34" charset="-122"/>
+                <a:cs typeface="Courier New" pitchFamily="34" charset="-120"/>
+              </a:rPr>
+              <a:t>,</a:t>
+            </a:r>
+            <a:r>
+              <a:rPr lang="en-US" sz="1050" dirty="0">
+                <a:solidFill>
+                  <a:srgbClr val="CCCCCC"/>
+                </a:solidFill>
+                <a:latin typeface="Courier New" pitchFamily="34" charset="0"/>
+                <a:ea typeface="Courier New" pitchFamily="34" charset="-122"/>
+                <a:cs typeface="Courier New" pitchFamily="34" charset="-120"/>
+              </a:rPr>
+              <a:t> </a:t>
+            </a:r>
+            <a:r>
+              <a:rPr lang="en-US" sz="1050" dirty="0">
+                <a:solidFill>
+                  <a:srgbClr val="CCCCCC"/>
+                </a:solidFill>
+                <a:latin typeface="Courier New" pitchFamily="34" charset="0"/>
+                <a:ea typeface="Courier New" pitchFamily="34" charset="-122"/>
+                <a:cs typeface="Courier New" pitchFamily="34" charset="-120"/>
+              </a:rPr>
+              <a:t>title</a:t>
+            </a:r>
+            <a:r>
+              <a:rPr lang="en-US" sz="1050" dirty="0">
+                <a:solidFill>
+                  <a:srgbClr val="CCCCCC"/>
+                </a:solidFill>
+                <a:latin typeface="Courier New" pitchFamily="34" charset="0"/>
+                <a:ea typeface="Courier New" pitchFamily="34" charset="-122"/>
+                <a:cs typeface="Courier New" pitchFamily="34" charset="-120"/>
+              </a:rPr>
+              <a:t>:</a:t>
+            </a:r>
+            <a:r>
+              <a:rPr lang="en-US" sz="1050" dirty="0">
+                <a:solidFill>
+                  <a:srgbClr val="CCCCCC"/>
+                </a:solidFill>
+                <a:latin typeface="Courier New" pitchFamily="34" charset="0"/>
+                <a:ea typeface="Courier New" pitchFamily="34" charset="-122"/>
+                <a:cs typeface="Courier New" pitchFamily="34" charset="-120"/>
+              </a:rPr>
+              <a:t> </a:t>
+            </a:r>
+            <a:r>
+              <a:rPr lang="en-US" sz="1050" dirty="0">
+                <a:solidFill>
+                  <a:srgbClr val="CE9178"/>
+                </a:solidFill>
+                <a:latin typeface="Courier New" pitchFamily="34" charset="0"/>
+                <a:ea typeface="Courier New" pitchFamily="34" charset="-122"/>
+                <a:cs typeface="Courier New" pitchFamily="34" charset="-120"/>
+              </a:rPr>
+              <a:t>'Valor total'</a:t>
             </a:r>
             <a:r>
               <a:rPr lang="en-US" sz="1050" dirty="0">
@@ -12718,7 +12956,7 @@
                 <a:ea typeface="Courier New" pitchFamily="34" charset="-122"/>
                 <a:cs typeface="Courier New" pitchFamily="34" charset="-120"/>
               </a:rPr>
-              <a:t>OverallStatus</a:t>
+              <a:t>ValorTotal</a:t>
             </a:r>
             <a:r>
               <a:rPr lang="en-US" sz="1050" dirty="0">
@@ -13395,7 +13633,7 @@
                   <a:srgbClr val="1D2D3E"/>
                 </a:solidFill>
               </a:rPr>
-              <a:t>Configurando o header do Booking no Page Editor</a:t>
+              <a:t>Configurando o header do item no Page Editor</a:t>
             </a:r>
             <a:endParaRPr lang="en-US" sz="2800" dirty="0"/>
           </a:p>
@@ -13561,7 +13799,7 @@
                   <a:srgbClr val="556B82"/>
                 </a:solidFill>
               </a:rPr>
-              <a:t>Booking ID</a:t>
+              <a:t>Item</a:t>
             </a:r>
             <a:r>
               <a:rPr lang="en-US" sz="1150" dirty="0">
@@ -13569,7 +13807,7 @@
                   <a:srgbClr val="556B82"/>
                 </a:solidFill>
               </a:rPr>
-              <a:t> como título e </a:t>
+              <a:t> (nome do produto) como título e </a:t>
             </a:r>
             <a:r>
               <a:rPr lang="en-US" sz="1150" i="1" dirty="0">
@@ -13577,7 +13815,7 @@
                   <a:srgbClr val="556B82"/>
                 </a:solidFill>
               </a:rPr>
-              <a:t>Booking</a:t>
+              <a:t>Item do pedido</a:t>
             </a:r>
             <a:r>
               <a:rPr lang="en-US" sz="1150" dirty="0">
@@ -13728,7 +13966,7 @@
                   <a:srgbClr val="556B82"/>
                 </a:solidFill>
               </a:rPr>
-              <a:t>O logo da companhia aérea ao lado do título.</a:t>
+              <a:t>A foto do item de estoque ao lado do título.</a:t>
             </a:r>
             <a:endParaRPr lang="en-US" sz="1400" dirty="0"/>
           </a:p>
@@ -13871,7 +14109,7 @@
                   <a:srgbClr val="556B82"/>
                 </a:solidFill>
               </a:rPr>
-              <a:t>Companhia, partida, aeroporto de origem, chegada e destino.</a:t>
+              <a:t>SKU, quantidade, preço unitário e total do item.</a:t>
             </a:r>
             <a:endParaRPr lang="en-US" sz="1400" dirty="0"/>
           </a:p>
@@ -14289,7 +14527,7 @@
                   <a:srgbClr val="89D1FF"/>
                 </a:solidFill>
               </a:rPr>
-              <a:t>AULA 03.09 · SEÇÃO 2</a:t>
+              <a:t>AULA 05.09 · SEÇÃO 2</a:t>
             </a:r>
             <a:endParaRPr lang="en-US" sz="1300" dirty="0"/>
           </a:p>
@@ -14567,7 +14805,7 @@
                   <a:srgbClr val="D1EFFF"/>
                 </a:solidFill>
               </a:rPr>
-              <a:t>  _Booking</a:t>
+              <a:t>  _Itens</a:t>
             </a:r>
             <a:endParaRPr lang="en-US" sz="1400" dirty="0"/>
           </a:p>
@@ -14606,7 +14844,7 @@
                 <a:ea typeface="Courier New" pitchFamily="34" charset="-122"/>
                 <a:cs typeface="Courier New" pitchFamily="34" charset="-120"/>
               </a:rPr>
-              <a:t>lineItem do Booking</a:t>
+              <a:t>lineItem do item</a:t>
             </a:r>
             <a:r>
               <a:rPr lang="en-US" sz="1000" dirty="0">
@@ -14653,7 +14891,7 @@
                 <a:ea typeface="Courier New" pitchFamily="34" charset="-122"/>
                 <a:cs typeface="Courier New" pitchFamily="34" charset="-120"/>
               </a:rPr>
-              <a:t>Texto e logo</a:t>
+              <a:t>Texto e foto</a:t>
             </a:r>
             <a:r>
               <a:rPr lang="en-US" sz="1000" dirty="0">
@@ -14748,7 +14986,7 @@
                   <a:srgbClr val="0064D9"/>
                 </a:solidFill>
               </a:rPr>
-              <a:t>TABELAS · BOOKINGS DA VIAGEM</a:t>
+              <a:t>TABELAS · ITENS DO PEDIDO</a:t>
             </a:r>
             <a:endParaRPr lang="en-US" sz="1100" dirty="0"/>
           </a:p>
@@ -14844,7 +15082,7 @@
                   <a:srgbClr val="0064D9"/>
                 </a:solidFill>
               </a:rPr>
-              <a:t>Travel</a:t>
+              <a:t>Pedido</a:t>
             </a:r>
             <a:endParaRPr lang="en-US" sz="1000" dirty="0"/>
           </a:p>
@@ -14908,7 +15146,7 @@
         <p:spPr>
           <a:xfrm>
             <a:off x="640080" y="2084832"/>
-            <a:ext cx="2852928" cy="292608"/>
+            <a:ext cx="2619756" cy="292608"/>
           </a:xfrm>
           <a:prstGeom prst="rect">
             <a:avLst/>
@@ -14928,7 +15166,7 @@
         <p:spPr>
           <a:xfrm>
             <a:off x="640080" y="2084832"/>
-            <a:ext cx="2852928" cy="27432"/>
+            <a:ext cx="2619756" cy="27432"/>
           </a:xfrm>
           <a:prstGeom prst="rect">
             <a:avLst/>
@@ -14948,7 +15186,7 @@
         <p:spPr>
           <a:xfrm>
             <a:off x="731520" y="2103120"/>
-            <a:ext cx="2670048" cy="274320"/>
+            <a:ext cx="2436876" cy="274320"/>
           </a:xfrm>
           <a:prstGeom prst="rect">
             <a:avLst/>
@@ -14969,7 +15207,7 @@
                   <a:srgbClr val="FFFFFF"/>
                 </a:solidFill>
               </a:rPr>
-              <a:t>zc_fe_travel_######.ddlx.asddlxs</a:t>
+              <a:t>zc_pc_pedido_app.ddlx.asddlxs</a:t>
             </a:r>
             <a:endParaRPr lang="en-US" sz="950" dirty="0"/>
           </a:p>
@@ -15135,6 +15373,26 @@
             </a:r>
             <a:endParaRPr lang="en-US" sz="1050" dirty="0"/>
           </a:p>
+          <a:p>
+            <a:pPr algn="r" indent="0" marL="0">
+              <a:lnSpc>
+                <a:spcPct val="105000"/>
+              </a:lnSpc>
+              <a:buNone/>
+            </a:pPr>
+            <a:r>
+              <a:rPr lang="en-US" sz="1050" dirty="0">
+                <a:solidFill>
+                  <a:srgbClr val="6E7681"/>
+                </a:solidFill>
+                <a:latin typeface="Courier New" pitchFamily="34" charset="0"/>
+                <a:ea typeface="Courier New" pitchFamily="34" charset="-122"/>
+                <a:cs typeface="Courier New" pitchFamily="34" charset="-120"/>
+              </a:rPr>
+              <a:t>8</a:t>
+            </a:r>
+            <a:endParaRPr lang="en-US" sz="1050" dirty="0"/>
+          </a:p>
         </p:txBody>
       </p:sp>
       <p:sp>
@@ -15325,7 +15583,7 @@
                 <a:ea typeface="Courier New" pitchFamily="34" charset="-122"/>
                 <a:cs typeface="Courier New" pitchFamily="34" charset="-120"/>
               </a:rPr>
-              <a:t>'Bookings'</a:t>
+              <a:t>'Itens'</a:t>
             </a:r>
             <a:r>
               <a:rPr lang="en-US" sz="1050" dirty="0">
@@ -15400,7 +15658,7 @@
                 <a:ea typeface="Courier New" pitchFamily="34" charset="-122"/>
                 <a:cs typeface="Courier New" pitchFamily="34" charset="-120"/>
               </a:rPr>
-              <a:t>'Bookings'</a:t>
+              <a:t>'Itens'</a:t>
             </a:r>
             <a:r>
               <a:rPr lang="en-US" sz="1050" dirty="0">
@@ -15475,7 +15733,7 @@
                 <a:ea typeface="Courier New" pitchFamily="34" charset="-122"/>
                 <a:cs typeface="Courier New" pitchFamily="34" charset="-120"/>
               </a:rPr>
-              <a:t>20</a:t>
+              <a:t>30</a:t>
             </a:r>
             <a:r>
               <a:rPr lang="en-US" sz="1050" dirty="0">
@@ -15636,29 +15894,18 @@
                 <a:ea typeface="Courier New" pitchFamily="34" charset="-122"/>
                 <a:cs typeface="Courier New" pitchFamily="34" charset="-120"/>
               </a:rPr>
-              <a:t>'_Booking'</a:t>
-            </a:r>
-            <a:r>
-              <a:rPr lang="en-US" sz="1050" dirty="0">
-                <a:solidFill>
-                  <a:srgbClr val="CCCCCC"/>
-                </a:solidFill>
-                <a:latin typeface="Courier New" pitchFamily="34" charset="0"/>
-                <a:ea typeface="Courier New" pitchFamily="34" charset="-122"/>
-                <a:cs typeface="Courier New" pitchFamily="34" charset="-120"/>
-              </a:rPr>
-              <a:t> </a:t>
-            </a:r>
-            <a:r>
-              <a:rPr lang="en-US" sz="1050" dirty="0">
-                <a:solidFill>
-                  <a:srgbClr val="CCCCCC"/>
-                </a:solidFill>
-                <a:latin typeface="Courier New" pitchFamily="34" charset="0"/>
-                <a:ea typeface="Courier New" pitchFamily="34" charset="-122"/>
-                <a:cs typeface="Courier New" pitchFamily="34" charset="-120"/>
-              </a:rPr>
-              <a:t>}</a:t>
+              <a:t>'_Itens'</a:t>
+            </a:r>
+            <a:r>
+              <a:rPr lang="en-US" sz="1050" dirty="0">
+                <a:solidFill>
+                  <a:srgbClr val="CCCCCC"/>
+                </a:solidFill>
+                <a:latin typeface="Courier New" pitchFamily="34" charset="0"/>
+                <a:ea typeface="Courier New" pitchFamily="34" charset="-122"/>
+                <a:cs typeface="Courier New" pitchFamily="34" charset="-120"/>
+              </a:rPr>
+              <a:t>,</a:t>
             </a:r>
             <a:endParaRPr lang="en-US" sz="1050" dirty="0"/>
           </a:p>
@@ -15678,6 +15925,125 @@
                 <a:ea typeface="Courier New" pitchFamily="34" charset="-122"/>
                 <a:cs typeface="Courier New" pitchFamily="34" charset="-120"/>
               </a:rPr>
+              <a:t>    </a:t>
+            </a:r>
+            <a:r>
+              <a:rPr lang="en-US" sz="1050" dirty="0">
+                <a:solidFill>
+                  <a:srgbClr val="CCCCCC"/>
+                </a:solidFill>
+                <a:latin typeface="Courier New" pitchFamily="34" charset="0"/>
+                <a:ea typeface="Courier New" pitchFamily="34" charset="-122"/>
+                <a:cs typeface="Courier New" pitchFamily="34" charset="-120"/>
+              </a:rPr>
+              <a:t>hidden</a:t>
+            </a:r>
+            <a:r>
+              <a:rPr lang="en-US" sz="1050" dirty="0">
+                <a:solidFill>
+                  <a:srgbClr val="CCCCCC"/>
+                </a:solidFill>
+                <a:latin typeface="Courier New" pitchFamily="34" charset="0"/>
+                <a:ea typeface="Courier New" pitchFamily="34" charset="-122"/>
+                <a:cs typeface="Courier New" pitchFamily="34" charset="-120"/>
+              </a:rPr>
+              <a:t>:</a:t>
+            </a:r>
+            <a:r>
+              <a:rPr lang="en-US" sz="1050" dirty="0">
+                <a:solidFill>
+                  <a:srgbClr val="CCCCCC"/>
+                </a:solidFill>
+                <a:latin typeface="Courier New" pitchFamily="34" charset="0"/>
+                <a:ea typeface="Courier New" pitchFamily="34" charset="-122"/>
+                <a:cs typeface="Courier New" pitchFamily="34" charset="-120"/>
+              </a:rPr>
+              <a:t> </a:t>
+            </a:r>
+            <a:r>
+              <a:rPr lang="en-US" sz="1050" dirty="0">
+                <a:solidFill>
+                  <a:srgbClr val="CCCCCC"/>
+                </a:solidFill>
+                <a:latin typeface="Courier New" pitchFamily="34" charset="0"/>
+                <a:ea typeface="Courier New" pitchFamily="34" charset="-122"/>
+                <a:cs typeface="Courier New" pitchFamily="34" charset="-120"/>
+              </a:rPr>
+              <a:t>#</a:t>
+            </a:r>
+            <a:r>
+              <a:rPr lang="en-US" sz="1050" dirty="0">
+                <a:solidFill>
+                  <a:srgbClr val="CCCCCC"/>
+                </a:solidFill>
+                <a:latin typeface="Courier New" pitchFamily="34" charset="0"/>
+                <a:ea typeface="Courier New" pitchFamily="34" charset="-122"/>
+                <a:cs typeface="Courier New" pitchFamily="34" charset="-120"/>
+              </a:rPr>
+              <a:t>(</a:t>
+            </a:r>
+            <a:r>
+              <a:rPr lang="en-US" sz="1050" dirty="0">
+                <a:solidFill>
+                  <a:srgbClr val="CCCCCC"/>
+                </a:solidFill>
+                <a:latin typeface="Courier New" pitchFamily="34" charset="0"/>
+                <a:ea typeface="Courier New" pitchFamily="34" charset="-122"/>
+                <a:cs typeface="Courier New" pitchFamily="34" charset="-120"/>
+              </a:rPr>
+              <a:t>PedidoEncerrado</a:t>
+            </a:r>
+            <a:r>
+              <a:rPr lang="en-US" sz="1050" dirty="0">
+                <a:solidFill>
+                  <a:srgbClr val="CCCCCC"/>
+                </a:solidFill>
+                <a:latin typeface="Courier New" pitchFamily="34" charset="0"/>
+                <a:ea typeface="Courier New" pitchFamily="34" charset="-122"/>
+                <a:cs typeface="Courier New" pitchFamily="34" charset="-120"/>
+              </a:rPr>
+              <a:t>)</a:t>
+            </a:r>
+            <a:r>
+              <a:rPr lang="en-US" sz="1050" dirty="0">
+                <a:solidFill>
+                  <a:srgbClr val="CCCCCC"/>
+                </a:solidFill>
+                <a:latin typeface="Courier New" pitchFamily="34" charset="0"/>
+                <a:ea typeface="Courier New" pitchFamily="34" charset="-122"/>
+                <a:cs typeface="Courier New" pitchFamily="34" charset="-120"/>
+              </a:rPr>
+              <a:t> </a:t>
+            </a:r>
+            <a:r>
+              <a:rPr lang="en-US" sz="1050" dirty="0">
+                <a:solidFill>
+                  <a:srgbClr val="CCCCCC"/>
+                </a:solidFill>
+                <a:latin typeface="Courier New" pitchFamily="34" charset="0"/>
+                <a:ea typeface="Courier New" pitchFamily="34" charset="-122"/>
+                <a:cs typeface="Courier New" pitchFamily="34" charset="-120"/>
+              </a:rPr>
+              <a:t>}</a:t>
+            </a:r>
+            <a:endParaRPr lang="en-US" sz="1050" dirty="0"/>
+          </a:p>
+          <a:p>
+            <a:pPr indent="0" marL="0">
+              <a:lnSpc>
+                <a:spcPct val="105000"/>
+              </a:lnSpc>
+              <a:buNone/>
+            </a:pPr>
+            <a:r>
+              <a:rPr lang="en-US" sz="1050" dirty="0">
+                <a:solidFill>
+                  <a:srgbClr val="CCCCCC"/>
+                </a:solidFill>
+                <a:latin typeface="Courier New" pitchFamily="34" charset="0"/>
+                <a:ea typeface="Courier New" pitchFamily="34" charset="-122"/>
+                <a:cs typeface="Courier New" pitchFamily="34" charset="-120"/>
+              </a:rPr>
               <a:t>]</a:t>
             </a:r>
             <a:endParaRPr lang="en-US" sz="1050" dirty="0"/>
@@ -15714,7 +16080,7 @@
                   <a:srgbClr val="556B82"/>
                 </a:solidFill>
               </a:rPr>
-              <a:t>A seção aponta para a associação; o conteúdo vem da entidade Booking.</a:t>
+              <a:t>A seção aponta para a associação; o conteúdo vem da entidade ItemPedido.</a:t>
             </a:r>
             <a:endParaRPr lang="en-US" sz="1400" dirty="0"/>
           </a:p>
@@ -15729,7 +16095,7 @@
         <p:spPr>
           <a:xfrm>
             <a:off x="6233008" y="1645920"/>
-            <a:ext cx="929030" cy="274320"/>
+            <a:ext cx="1170432" cy="274320"/>
           </a:xfrm>
           <a:prstGeom prst="roundRect">
             <a:avLst>
@@ -15751,7 +16117,7 @@
         <p:spPr>
           <a:xfrm>
             <a:off x="6233008" y="1645920"/>
-            <a:ext cx="929030" cy="274320"/>
+            <a:ext cx="1170432" cy="274320"/>
           </a:xfrm>
           <a:prstGeom prst="rect">
             <a:avLst/>
@@ -15772,7 +16138,7 @@
                   <a:srgbClr val="0064D9"/>
                 </a:solidFill>
               </a:rPr>
-              <a:t>Booking</a:t>
+              <a:t>ItemPedido</a:t>
             </a:r>
             <a:endParaRPr lang="en-US" sz="1000" dirty="0"/>
           </a:p>
@@ -15836,7 +16202,7 @@
         <p:spPr>
           <a:xfrm>
             <a:off x="6324448" y="2084832"/>
-            <a:ext cx="2930652" cy="292608"/>
+            <a:ext cx="3008376" cy="292608"/>
           </a:xfrm>
           <a:prstGeom prst="rect">
             <a:avLst/>
@@ -15856,7 +16222,7 @@
         <p:spPr>
           <a:xfrm>
             <a:off x="6324448" y="2084832"/>
-            <a:ext cx="2930652" cy="27432"/>
+            <a:ext cx="3008376" cy="27432"/>
           </a:xfrm>
           <a:prstGeom prst="rect">
             <a:avLst/>
@@ -15876,7 +16242,7 @@
         <p:spPr>
           <a:xfrm>
             <a:off x="6415888" y="2103120"/>
-            <a:ext cx="2747772" cy="274320"/>
+            <a:ext cx="2825496" cy="274320"/>
           </a:xfrm>
           <a:prstGeom prst="rect">
             <a:avLst/>
@@ -15897,7 +16263,7 @@
                   <a:srgbClr val="FFFFFF"/>
                 </a:solidFill>
               </a:rPr>
-              <a:t>zc_fe_booking_######.ddlx.asddlxs</a:t>
+              <a:t>zc_pc_item_pedido_app.ddlx.asddlxs</a:t>
             </a:r>
             <a:endParaRPr lang="en-US" sz="950" dirty="0"/>
           </a:p>
@@ -16253,7 +16619,73 @@
                 <a:ea typeface="Courier New" pitchFamily="34" charset="-122"/>
                 <a:cs typeface="Courier New" pitchFamily="34" charset="-120"/>
               </a:rPr>
-              <a:t>10</a:t>
+              <a:t>20</a:t>
+            </a:r>
+            <a:r>
+              <a:rPr lang="en-US" sz="1050" dirty="0">
+                <a:solidFill>
+                  <a:srgbClr val="CCCCCC"/>
+                </a:solidFill>
+                <a:latin typeface="Courier New" pitchFamily="34" charset="0"/>
+                <a:ea typeface="Courier New" pitchFamily="34" charset="-122"/>
+                <a:cs typeface="Courier New" pitchFamily="34" charset="-120"/>
+              </a:rPr>
+              <a:t>,</a:t>
+            </a:r>
+            <a:r>
+              <a:rPr lang="en-US" sz="1050" dirty="0">
+                <a:solidFill>
+                  <a:srgbClr val="CCCCCC"/>
+                </a:solidFill>
+                <a:latin typeface="Courier New" pitchFamily="34" charset="0"/>
+                <a:ea typeface="Courier New" pitchFamily="34" charset="-122"/>
+                <a:cs typeface="Courier New" pitchFamily="34" charset="-120"/>
+              </a:rPr>
+              <a:t> </a:t>
+            </a:r>
+            <a:r>
+              <a:rPr lang="en-US" sz="1050" dirty="0">
+                <a:solidFill>
+                  <a:srgbClr val="CCCCCC"/>
+                </a:solidFill>
+                <a:latin typeface="Courier New" pitchFamily="34" charset="0"/>
+                <a:ea typeface="Courier New" pitchFamily="34" charset="-122"/>
+                <a:cs typeface="Courier New" pitchFamily="34" charset="-120"/>
+              </a:rPr>
+              <a:t>label</a:t>
+            </a:r>
+            <a:r>
+              <a:rPr lang="en-US" sz="1050" dirty="0">
+                <a:solidFill>
+                  <a:srgbClr val="CCCCCC"/>
+                </a:solidFill>
+                <a:latin typeface="Courier New" pitchFamily="34" charset="0"/>
+                <a:ea typeface="Courier New" pitchFamily="34" charset="-122"/>
+                <a:cs typeface="Courier New" pitchFamily="34" charset="-120"/>
+              </a:rPr>
+              <a:t>:</a:t>
+            </a:r>
+            <a:r>
+              <a:rPr lang="en-US" sz="1050" dirty="0">
+                <a:solidFill>
+                  <a:srgbClr val="CCCCCC"/>
+                </a:solidFill>
+                <a:latin typeface="Courier New" pitchFamily="34" charset="0"/>
+                <a:ea typeface="Courier New" pitchFamily="34" charset="-122"/>
+                <a:cs typeface="Courier New" pitchFamily="34" charset="-120"/>
+              </a:rPr>
+              <a:t> </a:t>
+            </a:r>
+            <a:r>
+              <a:rPr lang="en-US" sz="1050" dirty="0">
+                <a:solidFill>
+                  <a:srgbClr val="CE9178"/>
+                </a:solidFill>
+                <a:latin typeface="Courier New" pitchFamily="34" charset="0"/>
+                <a:ea typeface="Courier New" pitchFamily="34" charset="-122"/>
+                <a:cs typeface="Courier New" pitchFamily="34" charset="-120"/>
+              </a:rPr>
+              <a:t>'SKU'</a:t>
             </a:r>
             <a:r>
               <a:rPr lang="en-US" sz="1050" dirty="0">
@@ -16306,7 +16738,7 @@
                 <a:ea typeface="Courier New" pitchFamily="34" charset="-122"/>
                 <a:cs typeface="Courier New" pitchFamily="34" charset="-120"/>
               </a:rPr>
-              <a:t>BookingID</a:t>
+              <a:t>Sku</a:t>
             </a:r>
             <a:r>
               <a:rPr lang="en-US" sz="1050" dirty="0">
@@ -16469,7 +16901,150 @@
                 <a:ea typeface="Courier New" pitchFamily="34" charset="-122"/>
                 <a:cs typeface="Courier New" pitchFamily="34" charset="-120"/>
               </a:rPr>
-              <a:t>20</a:t>
+              <a:t>40</a:t>
+            </a:r>
+            <a:r>
+              <a:rPr lang="en-US" sz="1050" dirty="0">
+                <a:solidFill>
+                  <a:srgbClr val="CCCCCC"/>
+                </a:solidFill>
+                <a:latin typeface="Courier New" pitchFamily="34" charset="0"/>
+                <a:ea typeface="Courier New" pitchFamily="34" charset="-122"/>
+                <a:cs typeface="Courier New" pitchFamily="34" charset="-120"/>
+              </a:rPr>
+              <a:t>,</a:t>
+            </a:r>
+            <a:r>
+              <a:rPr lang="en-US" sz="1050" dirty="0">
+                <a:solidFill>
+                  <a:srgbClr val="CCCCCC"/>
+                </a:solidFill>
+                <a:latin typeface="Courier New" pitchFamily="34" charset="0"/>
+                <a:ea typeface="Courier New" pitchFamily="34" charset="-122"/>
+                <a:cs typeface="Courier New" pitchFamily="34" charset="-120"/>
+              </a:rPr>
+              <a:t> </a:t>
+            </a:r>
+            <a:r>
+              <a:rPr lang="en-US" sz="1050" dirty="0">
+                <a:solidFill>
+                  <a:srgbClr val="CCCCCC"/>
+                </a:solidFill>
+                <a:latin typeface="Courier New" pitchFamily="34" charset="0"/>
+                <a:ea typeface="Courier New" pitchFamily="34" charset="-122"/>
+                <a:cs typeface="Courier New" pitchFamily="34" charset="-120"/>
+              </a:rPr>
+              <a:t>label</a:t>
+            </a:r>
+            <a:r>
+              <a:rPr lang="en-US" sz="1050" dirty="0">
+                <a:solidFill>
+                  <a:srgbClr val="CCCCCC"/>
+                </a:solidFill>
+                <a:latin typeface="Courier New" pitchFamily="34" charset="0"/>
+                <a:ea typeface="Courier New" pitchFamily="34" charset="-122"/>
+                <a:cs typeface="Courier New" pitchFamily="34" charset="-120"/>
+              </a:rPr>
+              <a:t>:</a:t>
+            </a:r>
+            <a:r>
+              <a:rPr lang="en-US" sz="1050" dirty="0">
+                <a:solidFill>
+                  <a:srgbClr val="CCCCCC"/>
+                </a:solidFill>
+                <a:latin typeface="Courier New" pitchFamily="34" charset="0"/>
+                <a:ea typeface="Courier New" pitchFamily="34" charset="-122"/>
+                <a:cs typeface="Courier New" pitchFamily="34" charset="-120"/>
+              </a:rPr>
+              <a:t> </a:t>
+            </a:r>
+            <a:r>
+              <a:rPr lang="en-US" sz="1050" dirty="0">
+                <a:solidFill>
+                  <a:srgbClr val="CE9178"/>
+                </a:solidFill>
+                <a:latin typeface="Courier New" pitchFamily="34" charset="0"/>
+                <a:ea typeface="Courier New" pitchFamily="34" charset="-122"/>
+                <a:cs typeface="Courier New" pitchFamily="34" charset="-120"/>
+              </a:rPr>
+              <a:t>'Quantidade'</a:t>
+            </a:r>
+            <a:r>
+              <a:rPr lang="en-US" sz="1050" dirty="0">
+                <a:solidFill>
+                  <a:srgbClr val="CCCCCC"/>
+                </a:solidFill>
+                <a:latin typeface="Courier New" pitchFamily="34" charset="0"/>
+                <a:ea typeface="Courier New" pitchFamily="34" charset="-122"/>
+                <a:cs typeface="Courier New" pitchFamily="34" charset="-120"/>
+              </a:rPr>
+              <a:t>,</a:t>
+            </a:r>
+            <a:r>
+              <a:rPr lang="en-US" sz="1050" dirty="0">
+                <a:solidFill>
+                  <a:srgbClr val="CCCCCC"/>
+                </a:solidFill>
+                <a:latin typeface="Courier New" pitchFamily="34" charset="0"/>
+                <a:ea typeface="Courier New" pitchFamily="34" charset="-122"/>
+                <a:cs typeface="Courier New" pitchFamily="34" charset="-120"/>
+              </a:rPr>
+              <a:t> </a:t>
+            </a:r>
+            <a:r>
+              <a:rPr lang="en-US" sz="1050" dirty="0">
+                <a:solidFill>
+                  <a:srgbClr val="CCCCCC"/>
+                </a:solidFill>
+                <a:latin typeface="Courier New" pitchFamily="34" charset="0"/>
+                <a:ea typeface="Courier New" pitchFamily="34" charset="-122"/>
+                <a:cs typeface="Courier New" pitchFamily="34" charset="-120"/>
+              </a:rPr>
+              <a:t>importance</a:t>
+            </a:r>
+            <a:r>
+              <a:rPr lang="en-US" sz="1050" dirty="0">
+                <a:solidFill>
+                  <a:srgbClr val="CCCCCC"/>
+                </a:solidFill>
+                <a:latin typeface="Courier New" pitchFamily="34" charset="0"/>
+                <a:ea typeface="Courier New" pitchFamily="34" charset="-122"/>
+                <a:cs typeface="Courier New" pitchFamily="34" charset="-120"/>
+              </a:rPr>
+              <a:t>:</a:t>
+            </a:r>
+            <a:r>
+              <a:rPr lang="en-US" sz="1050" dirty="0">
+                <a:solidFill>
+                  <a:srgbClr val="CCCCCC"/>
+                </a:solidFill>
+                <a:latin typeface="Courier New" pitchFamily="34" charset="0"/>
+                <a:ea typeface="Courier New" pitchFamily="34" charset="-122"/>
+                <a:cs typeface="Courier New" pitchFamily="34" charset="-120"/>
+              </a:rPr>
+              <a:t> </a:t>
+            </a:r>
+            <a:r>
+              <a:rPr lang="en-US" sz="1050" dirty="0">
+                <a:solidFill>
+                  <a:srgbClr val="CCCCCC"/>
+                </a:solidFill>
+                <a:latin typeface="Courier New" pitchFamily="34" charset="0"/>
+                <a:ea typeface="Courier New" pitchFamily="34" charset="-122"/>
+                <a:cs typeface="Courier New" pitchFamily="34" charset="-120"/>
+              </a:rPr>
+              <a:t>#</a:t>
+            </a:r>
+            <a:r>
+              <a:rPr lang="en-US" sz="1050" dirty="0">
+                <a:solidFill>
+                  <a:srgbClr val="CCCCCC"/>
+                </a:solidFill>
+                <a:latin typeface="Courier New" pitchFamily="34" charset="0"/>
+                <a:ea typeface="Courier New" pitchFamily="34" charset="-122"/>
+                <a:cs typeface="Courier New" pitchFamily="34" charset="-120"/>
+              </a:rPr>
+              <a:t>HIGH</a:t>
             </a:r>
             <a:r>
               <a:rPr lang="en-US" sz="1050" dirty="0">
@@ -16522,7 +17097,7 @@
                 <a:ea typeface="Courier New" pitchFamily="34" charset="-122"/>
                 <a:cs typeface="Courier New" pitchFamily="34" charset="-120"/>
               </a:rPr>
-              <a:t>BookingDate</a:t>
+              <a:t>QtdeItemPedido</a:t>
             </a:r>
             <a:r>
               <a:rPr lang="en-US" sz="1050" dirty="0">
@@ -16685,7 +17260,7 @@
                 <a:ea typeface="Courier New" pitchFamily="34" charset="-122"/>
                 <a:cs typeface="Courier New" pitchFamily="34" charset="-120"/>
               </a:rPr>
-              <a:t>30</a:t>
+              <a:t>50</a:t>
             </a:r>
             <a:r>
               <a:rPr lang="en-US" sz="1050" dirty="0">
@@ -16751,7 +17326,7 @@
                 <a:ea typeface="Courier New" pitchFamily="34" charset="-122"/>
                 <a:cs typeface="Courier New" pitchFamily="34" charset="-120"/>
               </a:rPr>
-              <a:t>'Airline'</a:t>
+              <a:t>'Preço unitário'</a:t>
             </a:r>
             <a:r>
               <a:rPr lang="en-US" sz="1050" dirty="0">
@@ -16804,7 +17379,7 @@
                 <a:ea typeface="Courier New" pitchFamily="34" charset="-122"/>
                 <a:cs typeface="Courier New" pitchFamily="34" charset="-120"/>
               </a:rPr>
-              <a:t>CarrierID</a:t>
+              <a:t>PrecoUnitarioSnapshot</a:t>
             </a:r>
             <a:r>
               <a:rPr lang="en-US" sz="1050" dirty="0">
@@ -16978,6 +17553,149 @@
                 <a:ea typeface="Courier New" pitchFamily="34" charset="-122"/>
                 <a:cs typeface="Courier New" pitchFamily="34" charset="-120"/>
               </a:rPr>
+              <a:t>,</a:t>
+            </a:r>
+            <a:r>
+              <a:rPr lang="en-US" sz="1050" dirty="0">
+                <a:solidFill>
+                  <a:srgbClr val="CCCCCC"/>
+                </a:solidFill>
+                <a:latin typeface="Courier New" pitchFamily="34" charset="0"/>
+                <a:ea typeface="Courier New" pitchFamily="34" charset="-122"/>
+                <a:cs typeface="Courier New" pitchFamily="34" charset="-120"/>
+              </a:rPr>
+              <a:t> </a:t>
+            </a:r>
+            <a:r>
+              <a:rPr lang="en-US" sz="1050" dirty="0">
+                <a:solidFill>
+                  <a:srgbClr val="CCCCCC"/>
+                </a:solidFill>
+                <a:latin typeface="Courier New" pitchFamily="34" charset="0"/>
+                <a:ea typeface="Courier New" pitchFamily="34" charset="-122"/>
+                <a:cs typeface="Courier New" pitchFamily="34" charset="-120"/>
+              </a:rPr>
+              <a:t>label</a:t>
+            </a:r>
+            <a:r>
+              <a:rPr lang="en-US" sz="1050" dirty="0">
+                <a:solidFill>
+                  <a:srgbClr val="CCCCCC"/>
+                </a:solidFill>
+                <a:latin typeface="Courier New" pitchFamily="34" charset="0"/>
+                <a:ea typeface="Courier New" pitchFamily="34" charset="-122"/>
+                <a:cs typeface="Courier New" pitchFamily="34" charset="-120"/>
+              </a:rPr>
+              <a:t>:</a:t>
+            </a:r>
+            <a:r>
+              <a:rPr lang="en-US" sz="1050" dirty="0">
+                <a:solidFill>
+                  <a:srgbClr val="CCCCCC"/>
+                </a:solidFill>
+                <a:latin typeface="Courier New" pitchFamily="34" charset="0"/>
+                <a:ea typeface="Courier New" pitchFamily="34" charset="-122"/>
+                <a:cs typeface="Courier New" pitchFamily="34" charset="-120"/>
+              </a:rPr>
+              <a:t> </a:t>
+            </a:r>
+            <a:r>
+              <a:rPr lang="en-US" sz="1050" dirty="0">
+                <a:solidFill>
+                  <a:srgbClr val="CE9178"/>
+                </a:solidFill>
+                <a:latin typeface="Courier New" pitchFamily="34" charset="0"/>
+                <a:ea typeface="Courier New" pitchFamily="34" charset="-122"/>
+                <a:cs typeface="Courier New" pitchFamily="34" charset="-120"/>
+              </a:rPr>
+              <a:t>'Total'</a:t>
+            </a:r>
+            <a:r>
+              <a:rPr lang="en-US" sz="1050" dirty="0">
+                <a:solidFill>
+                  <a:srgbClr val="CCCCCC"/>
+                </a:solidFill>
+                <a:latin typeface="Courier New" pitchFamily="34" charset="0"/>
+                <a:ea typeface="Courier New" pitchFamily="34" charset="-122"/>
+                <a:cs typeface="Courier New" pitchFamily="34" charset="-120"/>
+              </a:rPr>
+              <a:t>,</a:t>
+            </a:r>
+            <a:r>
+              <a:rPr lang="en-US" sz="1050" dirty="0">
+                <a:solidFill>
+                  <a:srgbClr val="CCCCCC"/>
+                </a:solidFill>
+                <a:latin typeface="Courier New" pitchFamily="34" charset="0"/>
+                <a:ea typeface="Courier New" pitchFamily="34" charset="-122"/>
+                <a:cs typeface="Courier New" pitchFamily="34" charset="-120"/>
+              </a:rPr>
+              <a:t> </a:t>
+            </a:r>
+            <a:r>
+              <a:rPr lang="en-US" sz="1050" dirty="0">
+                <a:solidFill>
+                  <a:srgbClr val="CCCCCC"/>
+                </a:solidFill>
+                <a:latin typeface="Courier New" pitchFamily="34" charset="0"/>
+                <a:ea typeface="Courier New" pitchFamily="34" charset="-122"/>
+                <a:cs typeface="Courier New" pitchFamily="34" charset="-120"/>
+              </a:rPr>
+              <a:t>importance</a:t>
+            </a:r>
+            <a:r>
+              <a:rPr lang="en-US" sz="1050" dirty="0">
+                <a:solidFill>
+                  <a:srgbClr val="CCCCCC"/>
+                </a:solidFill>
+                <a:latin typeface="Courier New" pitchFamily="34" charset="0"/>
+                <a:ea typeface="Courier New" pitchFamily="34" charset="-122"/>
+                <a:cs typeface="Courier New" pitchFamily="34" charset="-120"/>
+              </a:rPr>
+              <a:t>:</a:t>
+            </a:r>
+            <a:r>
+              <a:rPr lang="en-US" sz="1050" dirty="0">
+                <a:solidFill>
+                  <a:srgbClr val="CCCCCC"/>
+                </a:solidFill>
+                <a:latin typeface="Courier New" pitchFamily="34" charset="0"/>
+                <a:ea typeface="Courier New" pitchFamily="34" charset="-122"/>
+                <a:cs typeface="Courier New" pitchFamily="34" charset="-120"/>
+              </a:rPr>
+              <a:t> </a:t>
+            </a:r>
+            <a:r>
+              <a:rPr lang="en-US" sz="1050" dirty="0">
+                <a:solidFill>
+                  <a:srgbClr val="CCCCCC"/>
+                </a:solidFill>
+                <a:latin typeface="Courier New" pitchFamily="34" charset="0"/>
+                <a:ea typeface="Courier New" pitchFamily="34" charset="-122"/>
+                <a:cs typeface="Courier New" pitchFamily="34" charset="-120"/>
+              </a:rPr>
+              <a:t>#</a:t>
+            </a:r>
+            <a:r>
+              <a:rPr lang="en-US" sz="1050" dirty="0">
+                <a:solidFill>
+                  <a:srgbClr val="CCCCCC"/>
+                </a:solidFill>
+                <a:latin typeface="Courier New" pitchFamily="34" charset="0"/>
+                <a:ea typeface="Courier New" pitchFamily="34" charset="-122"/>
+                <a:cs typeface="Courier New" pitchFamily="34" charset="-120"/>
+              </a:rPr>
+              <a:t>HIGH</a:t>
+            </a:r>
+            <a:r>
+              <a:rPr lang="en-US" sz="1050" dirty="0">
+                <a:solidFill>
+                  <a:srgbClr val="CCCCCC"/>
+                </a:solidFill>
+                <a:latin typeface="Courier New" pitchFamily="34" charset="0"/>
+                <a:ea typeface="Courier New" pitchFamily="34" charset="-122"/>
+                <a:cs typeface="Courier New" pitchFamily="34" charset="-120"/>
+              </a:rPr>
               <a:t> </a:t>
             </a:r>
             <a:r>
@@ -17020,7 +17738,7 @@
                 <a:ea typeface="Courier New" pitchFamily="34" charset="-122"/>
                 <a:cs typeface="Courier New" pitchFamily="34" charset="-120"/>
               </a:rPr>
-              <a:t>FlightPrice</a:t>
+              <a:t>ValorTotal</a:t>
             </a:r>
             <a:r>
               <a:rPr lang="en-US" sz="1050" dirty="0">
@@ -17067,7 +17785,7 @@
                   <a:srgbClr val="556B82"/>
                 </a:solidFill>
               </a:rPr>
-              <a:t>No curso: BookingID, BookingDate, CarrierID, ConnectionID, CustomerID, FlightDate e FlightPrice.</a:t>
+              <a:t>No projeto: Item, SKU, disponível agora, quantidade, preço unitário e total.</a:t>
             </a:r>
             <a:endParaRPr lang="en-US" sz="1400" dirty="0"/>
           </a:p>
@@ -17317,12 +18035,31 @@
               <a:buNone/>
             </a:pPr>
             <a:r>
+              <a:rPr lang="en-US" sz="1300" dirty="0">
+                <a:solidFill>
+                  <a:srgbClr val="0064D9"/>
+                </a:solidFill>
+                <a:latin typeface="Courier New" pitchFamily="34" charset="0"/>
+                <a:ea typeface="Courier New" pitchFamily="34" charset="-122"/>
+                <a:cs typeface="Courier New" pitchFamily="34" charset="-120"/>
+              </a:rPr>
+              <a:t>label</a:t>
+            </a:r>
+            <a:r>
+              <a:rPr lang="en-US" sz="1300" dirty="0">
+                <a:solidFill>
+                  <a:srgbClr val="556B82"/>
+                </a:solidFill>
+              </a:rPr>
+              <a:t> troca o nome técnico: </a:t>
+            </a:r>
+            <a:r>
               <a:rPr lang="en-US" sz="1300" i="1" dirty="0">
                 <a:solidFill>
                   <a:srgbClr val="556B82"/>
                 </a:solidFill>
               </a:rPr>
-              <a:t>Customer ID</a:t>
+              <a:t>PrecoUnitarioSnapshot</a:t>
             </a:r>
             <a:r>
               <a:rPr lang="en-US" sz="1300" dirty="0">
@@ -17338,39 +18075,7 @@
                   <a:srgbClr val="556B82"/>
                 </a:solidFill>
               </a:rPr>
-              <a:t>Customer</a:t>
-            </a:r>
-            <a:r>
-              <a:rPr lang="en-US" sz="1300" dirty="0">
-                <a:solidFill>
-                  <a:srgbClr val="556B82"/>
-                </a:solidFill>
-              </a:rPr>
-              <a:t> e </a:t>
-            </a:r>
-            <a:r>
-              <a:rPr lang="en-US" sz="1300" i="1" dirty="0">
-                <a:solidFill>
-                  <a:srgbClr val="556B82"/>
-                </a:solidFill>
-              </a:rPr>
-              <a:t>Airline ID</a:t>
-            </a:r>
-            <a:r>
-              <a:rPr lang="en-US" sz="1300" dirty="0">
-                <a:solidFill>
-                  <a:srgbClr val="556B82"/>
-                </a:solidFill>
-              </a:rPr>
-              <a:t> vira </a:t>
-            </a:r>
-            <a:r>
-              <a:rPr lang="en-US" sz="1300" b="1" dirty="0">
-                <a:solidFill>
-                  <a:srgbClr val="556B82"/>
-                </a:solidFill>
-              </a:rPr>
-              <a:t>Airline</a:t>
+              <a:t>Preço unitário</a:t>
             </a:r>
             <a:r>
               <a:rPr lang="en-US" sz="1300" dirty="0">
@@ -17473,7 +18178,7 @@
                   <a:srgbClr val="1D2D3E"/>
                 </a:solidFill>
               </a:rPr>
-              <a:t>Texto junto do código</a:t>
+              <a:t>Texto no lugar da chave</a:t>
             </a:r>
             <a:endParaRPr lang="en-US" sz="1400" dirty="0"/>
           </a:p>
@@ -17487,7 +18192,26 @@
                   <a:srgbClr val="556B82"/>
                 </a:solidFill>
               </a:rPr>
-              <a:t>Sobrenome do cliente e nome da companhia ao lado das chaves.</a:t>
+              <a:t>O UUID do item aparece como o nome do produto (</a:t>
+            </a:r>
+            <a:r>
+              <a:rPr lang="en-US" sz="1300" dirty="0">
+                <a:solidFill>
+                  <a:srgbClr val="0064D9"/>
+                </a:solidFill>
+                <a:latin typeface="Courier New" pitchFamily="34" charset="0"/>
+                <a:ea typeface="Courier New" pitchFamily="34" charset="-122"/>
+                <a:cs typeface="Courier New" pitchFamily="34" charset="-120"/>
+              </a:rPr>
+              <a:t>#TEXT_ONLY</a:t>
+            </a:r>
+            <a:r>
+              <a:rPr lang="en-US" sz="1300" dirty="0">
+                <a:solidFill>
+                  <a:srgbClr val="556B82"/>
+                </a:solidFill>
+              </a:rPr>
+              <a:t>).</a:t>
             </a:r>
             <a:endParaRPr lang="en-US" sz="1400" dirty="0"/>
           </a:p>
@@ -17582,7 +18306,7 @@
                   <a:srgbClr val="1D2D3E"/>
                 </a:solidFill>
               </a:rPr>
-              <a:t>Logo</a:t>
+              <a:t>Foto</a:t>
             </a:r>
             <a:endParaRPr lang="en-US" sz="1400" dirty="0"/>
           </a:p>
@@ -17596,7 +18320,26 @@
                   <a:srgbClr val="556B82"/>
                 </a:solidFill>
               </a:rPr>
-              <a:t>Uma coluna de imagem com o logo da companhia, sem rótulo.</a:t>
+              <a:t>No app de estoque, </a:t>
+            </a:r>
+            <a:r>
+              <a:rPr lang="en-US" sz="1300" dirty="0">
+                <a:solidFill>
+                  <a:srgbClr val="0064D9"/>
+                </a:solidFill>
+                <a:latin typeface="Courier New" pitchFamily="34" charset="0"/>
+                <a:ea typeface="Courier New" pitchFamily="34" charset="-122"/>
+                <a:cs typeface="Courier New" pitchFamily="34" charset="-120"/>
+              </a:rPr>
+              <a:t>FotoItem</a:t>
+            </a:r>
+            <a:r>
+              <a:rPr lang="en-US" sz="1300" dirty="0">
+                <a:solidFill>
+                  <a:srgbClr val="556B82"/>
+                </a:solidFill>
+              </a:rPr>
+              <a:t> vira uma coluna de imagem.</a:t>
             </a:r>
             <a:endParaRPr lang="en-US" sz="1400" dirty="0"/>
           </a:p>
@@ -17662,7 +18405,7 @@
                   <a:srgbClr val="1D2D3E"/>
                 </a:solidFill>
               </a:rPr>
-              <a:t>com a subobject page da aula 03.08, clicar no booking abre seus detalhes.</a:t>
+              <a:t>com a subobject page da aula 05.08, clicar no item abre seus detalhes.</a:t>
             </a:r>
             <a:endParaRPr lang="en-US" sz="1400" dirty="0"/>
           </a:p>
@@ -17684,7 +18427,7 @@
         </p:blipFill>
         <p:spPr>
           <a:xfrm>
-            <a:off x="850392" y="2876042"/>
+            <a:off x="4624730" y="2876042"/>
             <a:ext cx="256032" cy="256032"/>
           </a:xfrm>
           <a:prstGeom prst="rect">
@@ -17708,7 +18451,7 @@
         </p:blipFill>
         <p:spPr>
           <a:xfrm>
-            <a:off x="4624730" y="2876042"/>
+            <a:off x="8399069" y="2876042"/>
             <a:ext cx="256032" cy="256032"/>
           </a:xfrm>
           <a:prstGeom prst="rect">
@@ -17732,7 +18475,7 @@
         </p:blipFill>
         <p:spPr>
           <a:xfrm>
-            <a:off x="8399069" y="2876042"/>
+            <a:off x="850392" y="2876042"/>
             <a:ext cx="256032" cy="256032"/>
           </a:xfrm>
           <a:prstGeom prst="rect">
